--- a/skills/presentation-template-library/skills/artifact-template-soft-proof/assets/reference.pptx
+++ b/skills/presentation-template-library/skills/artifact-template-soft-proof/assets/reference.pptx
@@ -2625,7 +2625,7 @@
         </p:xfrm>
         <a:graphic xmlns:a="http://schemas.openxmlformats.org/drawingml/2006/main">
           <a:graphicData uri="http://schemas.openxmlformats.org/drawingml/2006/chart">
-            <c:chart xmlns:r="http://schemas.openxmlformats.org/officeDocument/2006/relationships" xmlns:c="http://schemas.openxmlformats.org/drawingml/2006/chart" r:id="Re8de204671e842fb"/>
+            <c:chart xmlns:r="http://schemas.openxmlformats.org/officeDocument/2006/relationships" xmlns:c="http://schemas.openxmlformats.org/drawingml/2006/chart" r:id="R2edc8229062945b9"/>
           </a:graphicData>
         </a:graphic>
       </p:graphicFrame>
@@ -2643,7 +2643,7 @@
         </p:xfrm>
         <a:graphic xmlns:a="http://schemas.openxmlformats.org/drawingml/2006/main">
           <a:graphicData uri="http://schemas.openxmlformats.org/drawingml/2006/chart">
-            <c:chart xmlns:r="http://schemas.openxmlformats.org/officeDocument/2006/relationships" xmlns:c="http://schemas.openxmlformats.org/drawingml/2006/chart" r:id="R76fb843ea047466b"/>
+            <c:chart xmlns:r="http://schemas.openxmlformats.org/officeDocument/2006/relationships" xmlns:c="http://schemas.openxmlformats.org/drawingml/2006/chart" r:id="R0e5a86721c164c7c"/>
           </a:graphicData>
         </a:graphic>
       </p:graphicFrame>
@@ -4130,7 +4130,7 @@
         </p:xfrm>
         <a:graphic xmlns:a="http://schemas.openxmlformats.org/drawingml/2006/main">
           <a:graphicData uri="http://schemas.openxmlformats.org/drawingml/2006/chart">
-            <c:chart xmlns:r="http://schemas.openxmlformats.org/officeDocument/2006/relationships" xmlns:c="http://schemas.openxmlformats.org/drawingml/2006/chart" r:id="Re4a44d1bd0084d57"/>
+            <c:chart xmlns:r="http://schemas.openxmlformats.org/officeDocument/2006/relationships" xmlns:c="http://schemas.openxmlformats.org/drawingml/2006/chart" r:id="R23ac79eb7b9448cb"/>
           </a:graphicData>
         </a:graphic>
       </p:graphicFrame>
@@ -4148,7 +4148,7 @@
         </p:xfrm>
         <a:graphic xmlns:a="http://schemas.openxmlformats.org/drawingml/2006/main">
           <a:graphicData uri="http://schemas.openxmlformats.org/drawingml/2006/chart">
-            <c:chart xmlns:r="http://schemas.openxmlformats.org/officeDocument/2006/relationships" xmlns:c="http://schemas.openxmlformats.org/drawingml/2006/chart" r:id="R22c3ddf4d9894e8b"/>
+            <c:chart xmlns:r="http://schemas.openxmlformats.org/officeDocument/2006/relationships" xmlns:c="http://schemas.openxmlformats.org/drawingml/2006/chart" r:id="Rc8282334bb1b4253"/>
           </a:graphicData>
         </a:graphic>
       </p:graphicFrame>

--- a/skills/presentation-template-library/skills/artifact-template-soft-proof/assets/reference.pptx
+++ b/skills/presentation-template-library/skills/artifact-template-soft-proof/assets/reference.pptx
@@ -2625,7 +2625,7 @@
         </p:xfrm>
         <a:graphic xmlns:a="http://schemas.openxmlformats.org/drawingml/2006/main">
           <a:graphicData uri="http://schemas.openxmlformats.org/drawingml/2006/chart">
-            <c:chart xmlns:r="http://schemas.openxmlformats.org/officeDocument/2006/relationships" xmlns:c="http://schemas.openxmlformats.org/drawingml/2006/chart" r:id="R2edc8229062945b9"/>
+            <c:chart xmlns:r="http://schemas.openxmlformats.org/officeDocument/2006/relationships" xmlns:c="http://schemas.openxmlformats.org/drawingml/2006/chart" r:id="Re1f5af4a62db4340"/>
           </a:graphicData>
         </a:graphic>
       </p:graphicFrame>
@@ -2643,7 +2643,7 @@
         </p:xfrm>
         <a:graphic xmlns:a="http://schemas.openxmlformats.org/drawingml/2006/main">
           <a:graphicData uri="http://schemas.openxmlformats.org/drawingml/2006/chart">
-            <c:chart xmlns:r="http://schemas.openxmlformats.org/officeDocument/2006/relationships" xmlns:c="http://schemas.openxmlformats.org/drawingml/2006/chart" r:id="R0e5a86721c164c7c"/>
+            <c:chart xmlns:r="http://schemas.openxmlformats.org/officeDocument/2006/relationships" xmlns:c="http://schemas.openxmlformats.org/drawingml/2006/chart" r:id="R2177e8abd7304993"/>
           </a:graphicData>
         </a:graphic>
       </p:graphicFrame>
@@ -4130,7 +4130,7 @@
         </p:xfrm>
         <a:graphic xmlns:a="http://schemas.openxmlformats.org/drawingml/2006/main">
           <a:graphicData uri="http://schemas.openxmlformats.org/drawingml/2006/chart">
-            <c:chart xmlns:r="http://schemas.openxmlformats.org/officeDocument/2006/relationships" xmlns:c="http://schemas.openxmlformats.org/drawingml/2006/chart" r:id="R23ac79eb7b9448cb"/>
+            <c:chart xmlns:r="http://schemas.openxmlformats.org/officeDocument/2006/relationships" xmlns:c="http://schemas.openxmlformats.org/drawingml/2006/chart" r:id="R2a6db068f33448d6"/>
           </a:graphicData>
         </a:graphic>
       </p:graphicFrame>
@@ -4148,7 +4148,7 @@
         </p:xfrm>
         <a:graphic xmlns:a="http://schemas.openxmlformats.org/drawingml/2006/main">
           <a:graphicData uri="http://schemas.openxmlformats.org/drawingml/2006/chart">
-            <c:chart xmlns:r="http://schemas.openxmlformats.org/officeDocument/2006/relationships" xmlns:c="http://schemas.openxmlformats.org/drawingml/2006/chart" r:id="Rc8282334bb1b4253"/>
+            <c:chart xmlns:r="http://schemas.openxmlformats.org/officeDocument/2006/relationships" xmlns:c="http://schemas.openxmlformats.org/drawingml/2006/chart" r:id="R6348fb9fa5f744dd"/>
           </a:graphicData>
         </a:graphic>
       </p:graphicFrame>

--- a/skills/presentation-template-library/skills/artifact-template-soft-proof/assets/reference.pptx
+++ b/skills/presentation-template-library/skills/artifact-template-soft-proof/assets/reference.pptx
@@ -2625,7 +2625,7 @@
         </p:xfrm>
         <a:graphic xmlns:a="http://schemas.openxmlformats.org/drawingml/2006/main">
           <a:graphicData uri="http://schemas.openxmlformats.org/drawingml/2006/chart">
-            <c:chart xmlns:r="http://schemas.openxmlformats.org/officeDocument/2006/relationships" xmlns:c="http://schemas.openxmlformats.org/drawingml/2006/chart" r:id="Re1f5af4a62db4340"/>
+            <c:chart xmlns:r="http://schemas.openxmlformats.org/officeDocument/2006/relationships" xmlns:c="http://schemas.openxmlformats.org/drawingml/2006/chart" r:id="Rb8d4e27017884d8b"/>
           </a:graphicData>
         </a:graphic>
       </p:graphicFrame>
@@ -2643,7 +2643,7 @@
         </p:xfrm>
         <a:graphic xmlns:a="http://schemas.openxmlformats.org/drawingml/2006/main">
           <a:graphicData uri="http://schemas.openxmlformats.org/drawingml/2006/chart">
-            <c:chart xmlns:r="http://schemas.openxmlformats.org/officeDocument/2006/relationships" xmlns:c="http://schemas.openxmlformats.org/drawingml/2006/chart" r:id="R2177e8abd7304993"/>
+            <c:chart xmlns:r="http://schemas.openxmlformats.org/officeDocument/2006/relationships" xmlns:c="http://schemas.openxmlformats.org/drawingml/2006/chart" r:id="Rc1aca8b3f0a441c4"/>
           </a:graphicData>
         </a:graphic>
       </p:graphicFrame>
@@ -4130,7 +4130,7 @@
         </p:xfrm>
         <a:graphic xmlns:a="http://schemas.openxmlformats.org/drawingml/2006/main">
           <a:graphicData uri="http://schemas.openxmlformats.org/drawingml/2006/chart">
-            <c:chart xmlns:r="http://schemas.openxmlformats.org/officeDocument/2006/relationships" xmlns:c="http://schemas.openxmlformats.org/drawingml/2006/chart" r:id="R2a6db068f33448d6"/>
+            <c:chart xmlns:r="http://schemas.openxmlformats.org/officeDocument/2006/relationships" xmlns:c="http://schemas.openxmlformats.org/drawingml/2006/chart" r:id="R12cd84b3632d43fa"/>
           </a:graphicData>
         </a:graphic>
       </p:graphicFrame>
@@ -4148,7 +4148,7 @@
         </p:xfrm>
         <a:graphic xmlns:a="http://schemas.openxmlformats.org/drawingml/2006/main">
           <a:graphicData uri="http://schemas.openxmlformats.org/drawingml/2006/chart">
-            <c:chart xmlns:r="http://schemas.openxmlformats.org/officeDocument/2006/relationships" xmlns:c="http://schemas.openxmlformats.org/drawingml/2006/chart" r:id="R6348fb9fa5f744dd"/>
+            <c:chart xmlns:r="http://schemas.openxmlformats.org/officeDocument/2006/relationships" xmlns:c="http://schemas.openxmlformats.org/drawingml/2006/chart" r:id="R7135a8525b7d4b76"/>
           </a:graphicData>
         </a:graphic>
       </p:graphicFrame>

--- a/skills/presentation-template-library/skills/artifact-template-soft-proof/assets/reference.pptx
+++ b/skills/presentation-template-library/skills/artifact-template-soft-proof/assets/reference.pptx
@@ -194,511 +194,6 @@
 </a:theme>
 </file>
 
-<file path=ppt/slides/charts/chart1.xml><?xml version="1.0" encoding="utf-8"?>
-<c:chartSpace xmlns:c="http://schemas.openxmlformats.org/drawingml/2006/chart" xmlns:a="http://schemas.openxmlformats.org/drawingml/2006/main">
-  <c:chart>
-    <c:title>
-      <c:tx>
-        <c:rich>
-          <a:bodyPr/>
-          <a:lstStyle/>
-          <a:p>
-            <a:r>
-              <a:t>Primary signal · observed versus reference</a:t>
-            </a:r>
-          </a:p>
-        </c:rich>
-      </c:tx>
-      <c:layout/>
-    </c:title>
-    <c:plotArea>
-      <c:layout/>
-      <c:barChart>
-        <c:barDir val="col"/>
-        <c:grouping val="clustered"/>
-        <c:ser>
-          <c:idx val="0"/>
-          <c:order val="0"/>
-          <c:tx>
-            <c:v>Observed</c:v>
-          </c:tx>
-          <c:spPr>
-            <a:solidFill>
-              <a:srgbClr val="2278E8"/>
-            </a:solidFill>
-          </c:spPr>
-          <c:cat>
-            <c:strLit>
-              <c:ptCount val="6"/>
-              <c:pt idx="0">
-                <c:v>Q1</c:v>
-              </c:pt>
-              <c:pt idx="1">
-                <c:v>Q2</c:v>
-              </c:pt>
-              <c:pt idx="2">
-                <c:v>Q3</c:v>
-              </c:pt>
-              <c:pt idx="3">
-                <c:v>Q4</c:v>
-              </c:pt>
-              <c:pt idx="4">
-                <c:v>Q5</c:v>
-              </c:pt>
-              <c:pt idx="5">
-                <c:v>Q6</c:v>
-              </c:pt>
-            </c:strLit>
-          </c:cat>
-          <c:val>
-            <c:numLit>
-              <c:formatCode>General</c:formatCode>
-              <c:ptCount val="6"/>
-              <c:pt idx="0">
-                <c:v>38</c:v>
-              </c:pt>
-              <c:pt idx="1">
-                <c:v>46</c:v>
-              </c:pt>
-              <c:pt idx="2">
-                <c:v>43</c:v>
-              </c:pt>
-              <c:pt idx="3">
-                <c:v>58</c:v>
-              </c:pt>
-              <c:pt idx="4">
-                <c:v>68</c:v>
-              </c:pt>
-              <c:pt idx="5">
-                <c:v>74</c:v>
-              </c:pt>
-            </c:numLit>
-          </c:val>
-        </c:ser>
-        <c:ser>
-          <c:idx val="1"/>
-          <c:order val="1"/>
-          <c:tx>
-            <c:v>Reference</c:v>
-          </c:tx>
-          <c:spPr>
-            <a:solidFill>
-              <a:srgbClr val="8F9B9E"/>
-            </a:solidFill>
-          </c:spPr>
-          <c:cat>
-            <c:strLit>
-              <c:ptCount val="6"/>
-              <c:pt idx="0">
-                <c:v>Q1</c:v>
-              </c:pt>
-              <c:pt idx="1">
-                <c:v>Q2</c:v>
-              </c:pt>
-              <c:pt idx="2">
-                <c:v>Q3</c:v>
-              </c:pt>
-              <c:pt idx="3">
-                <c:v>Q4</c:v>
-              </c:pt>
-              <c:pt idx="4">
-                <c:v>Q5</c:v>
-              </c:pt>
-              <c:pt idx="5">
-                <c:v>Q6</c:v>
-              </c:pt>
-            </c:strLit>
-          </c:cat>
-          <c:val>
-            <c:numLit>
-              <c:formatCode>General</c:formatCode>
-              <c:ptCount val="6"/>
-              <c:pt idx="0">
-                <c:v>34</c:v>
-              </c:pt>
-              <c:pt idx="1">
-                <c:v>39</c:v>
-              </c:pt>
-              <c:pt idx="2">
-                <c:v>41</c:v>
-              </c:pt>
-              <c:pt idx="3">
-                <c:v>45</c:v>
-              </c:pt>
-              <c:pt idx="4">
-                <c:v>49</c:v>
-              </c:pt>
-              <c:pt idx="5">
-                <c:v>52</c:v>
-              </c:pt>
-            </c:numLit>
-          </c:val>
-        </c:ser>
-        <c:axId val="1"/>
-        <c:axId val="2"/>
-      </c:barChart>
-      <c:catAx>
-        <c:axId val="1"/>
-        <c:scaling>
-          <c:orientation val="minMax"/>
-        </c:scaling>
-        <c:axPos val="b"/>
-        <c:crossAx val="2"/>
-      </c:catAx>
-      <c:valAx>
-        <c:axId val="2"/>
-        <c:scaling>
-          <c:orientation val="minMax"/>
-        </c:scaling>
-        <c:axPos val="l"/>
-        <c:crossAx val="1"/>
-      </c:valAx>
-    </c:plotArea>
-    <c:legend>
-      <c:legendPos val="r"/>
-      <c:layout/>
-    </c:legend>
-    <c:plotVisOnly val="1"/>
-  </c:chart>
-</c:chartSpace>
-</file>
-
-<file path=ppt/slides/charts/chart2.xml><?xml version="1.0" encoding="utf-8"?>
-<c:chartSpace xmlns:c="http://schemas.openxmlformats.org/drawingml/2006/chart" xmlns:a="http://schemas.openxmlformats.org/drawingml/2006/main">
-  <c:chart>
-    <c:title>
-      <c:tx>
-        <c:rich>
-          <a:bodyPr/>
-          <a:lstStyle/>
-          <a:p>
-            <a:r>
-              <a:t>Driver trend</a:t>
-            </a:r>
-          </a:p>
-        </c:rich>
-      </c:tx>
-      <c:layout/>
-    </c:title>
-    <c:plotArea>
-      <c:layout/>
-      <c:lineChart>
-        <c:grouping val="standard"/>
-        <c:ser>
-          <c:idx val="0"/>
-          <c:order val="0"/>
-          <c:tx>
-            <c:v>Driver</c:v>
-          </c:tx>
-          <c:spPr>
-            <a:solidFill>
-              <a:srgbClr val="B64A98"/>
-            </a:solidFill>
-            <a:ln w="38100">
-              <a:solidFill>
-                <a:srgbClr val="B64A98"/>
-              </a:solidFill>
-              <a:prstDash val="solid"/>
-            </a:ln>
-          </c:spPr>
-          <c:marker>
-            <c:symbol val="circle"/>
-            <c:size val="6"/>
-          </c:marker>
-          <c:cat>
-            <c:strLit>
-              <c:ptCount val="6"/>
-              <c:pt idx="0">
-                <c:v>Q1</c:v>
-              </c:pt>
-              <c:pt idx="1">
-                <c:v>Q2</c:v>
-              </c:pt>
-              <c:pt idx="2">
-                <c:v>Q3</c:v>
-              </c:pt>
-              <c:pt idx="3">
-                <c:v>Q4</c:v>
-              </c:pt>
-              <c:pt idx="4">
-                <c:v>Q5</c:v>
-              </c:pt>
-              <c:pt idx="5">
-                <c:v>Q6</c:v>
-              </c:pt>
-            </c:strLit>
-          </c:cat>
-          <c:val>
-            <c:numLit>
-              <c:formatCode>General</c:formatCode>
-              <c:ptCount val="6"/>
-              <c:pt idx="0">
-                <c:v>22</c:v>
-              </c:pt>
-              <c:pt idx="1">
-                <c:v>28</c:v>
-              </c:pt>
-              <c:pt idx="2">
-                <c:v>34</c:v>
-              </c:pt>
-              <c:pt idx="3">
-                <c:v>39</c:v>
-              </c:pt>
-              <c:pt idx="4">
-                <c:v>45</c:v>
-              </c:pt>
-              <c:pt idx="5">
-                <c:v>51</c:v>
-              </c:pt>
-            </c:numLit>
-          </c:val>
-        </c:ser>
-        <c:axId val="1"/>
-        <c:axId val="2"/>
-      </c:lineChart>
-      <c:catAx>
-        <c:axId val="1"/>
-        <c:scaling>
-          <c:orientation val="minMax"/>
-        </c:scaling>
-        <c:axPos val="b"/>
-        <c:crossAx val="2"/>
-      </c:catAx>
-      <c:valAx>
-        <c:axId val="2"/>
-        <c:scaling>
-          <c:orientation val="minMax"/>
-        </c:scaling>
-        <c:axPos val="l"/>
-        <c:crossAx val="1"/>
-      </c:valAx>
-    </c:plotArea>
-    <c:plotVisOnly val="1"/>
-  </c:chart>
-</c:chartSpace>
-</file>
-
-<file path=ppt/slides/charts/chart3.xml><?xml version="1.0" encoding="utf-8"?>
-<c:chartSpace xmlns:c="http://schemas.openxmlformats.org/drawingml/2006/chart" xmlns:a="http://schemas.openxmlformats.org/drawingml/2006/main">
-  <c:chart>
-    <c:title>
-      <c:tx>
-        <c:rich>
-          <a:bodyPr/>
-          <a:lstStyle/>
-          <a:p>
-            <a:r>
-              <a:t>Observed signal</a:t>
-            </a:r>
-          </a:p>
-        </c:rich>
-      </c:tx>
-      <c:layout/>
-    </c:title>
-    <c:plotArea>
-      <c:layout/>
-      <c:barChart>
-        <c:barDir val="col"/>
-        <c:grouping val="clustered"/>
-        <c:ser>
-          <c:idx val="0"/>
-          <c:order val="0"/>
-          <c:tx>
-            <c:v>Observed</c:v>
-          </c:tx>
-          <c:spPr>
-            <a:solidFill>
-              <a:srgbClr val="2278E8"/>
-            </a:solidFill>
-          </c:spPr>
-          <c:cat>
-            <c:strLit>
-              <c:ptCount val="6"/>
-              <c:pt idx="0">
-                <c:v>A</c:v>
-              </c:pt>
-              <c:pt idx="1">
-                <c:v>B</c:v>
-              </c:pt>
-              <c:pt idx="2">
-                <c:v>C</c:v>
-              </c:pt>
-              <c:pt idx="3">
-                <c:v>D</c:v>
-              </c:pt>
-              <c:pt idx="4">
-                <c:v>E</c:v>
-              </c:pt>
-              <c:pt idx="5">
-                <c:v>F</c:v>
-              </c:pt>
-            </c:strLit>
-          </c:cat>
-          <c:val>
-            <c:numLit>
-              <c:formatCode>General</c:formatCode>
-              <c:ptCount val="6"/>
-              <c:pt idx="0">
-                <c:v>38</c:v>
-              </c:pt>
-              <c:pt idx="1">
-                <c:v>46</c:v>
-              </c:pt>
-              <c:pt idx="2">
-                <c:v>43</c:v>
-              </c:pt>
-              <c:pt idx="3">
-                <c:v>58</c:v>
-              </c:pt>
-              <c:pt idx="4">
-                <c:v>68</c:v>
-              </c:pt>
-              <c:pt idx="5">
-                <c:v>74</c:v>
-              </c:pt>
-            </c:numLit>
-          </c:val>
-        </c:ser>
-        <c:axId val="1"/>
-        <c:axId val="2"/>
-      </c:barChart>
-      <c:catAx>
-        <c:axId val="1"/>
-        <c:scaling>
-          <c:orientation val="minMax"/>
-        </c:scaling>
-        <c:axPos val="b"/>
-        <c:crossAx val="2"/>
-      </c:catAx>
-      <c:valAx>
-        <c:axId val="2"/>
-        <c:scaling>
-          <c:orientation val="minMax"/>
-        </c:scaling>
-        <c:axPos val="l"/>
-        <c:crossAx val="1"/>
-      </c:valAx>
-    </c:plotArea>
-    <c:plotVisOnly val="1"/>
-  </c:chart>
-</c:chartSpace>
-</file>
-
-<file path=ppt/slides/charts/chart4.xml><?xml version="1.0" encoding="utf-8"?>
-<c:chartSpace xmlns:c="http://schemas.openxmlformats.org/drawingml/2006/chart" xmlns:a="http://schemas.openxmlformats.org/drawingml/2006/main">
-  <c:chart>
-    <c:title>
-      <c:tx>
-        <c:rich>
-          <a:bodyPr/>
-          <a:lstStyle/>
-          <a:p>
-            <a:r>
-              <a:t>Context</a:t>
-            </a:r>
-          </a:p>
-        </c:rich>
-      </c:tx>
-      <c:layout/>
-    </c:title>
-    <c:plotArea>
-      <c:layout/>
-      <c:lineChart>
-        <c:grouping val="standard"/>
-        <c:ser>
-          <c:idx val="0"/>
-          <c:order val="0"/>
-          <c:tx>
-            <c:v>Context</c:v>
-          </c:tx>
-          <c:spPr>
-            <a:solidFill>
-              <a:srgbClr val="B64A98"/>
-            </a:solidFill>
-            <a:ln w="38100">
-              <a:solidFill>
-                <a:srgbClr val="B64A98"/>
-              </a:solidFill>
-              <a:prstDash val="solid"/>
-            </a:ln>
-          </c:spPr>
-          <c:marker>
-            <c:symbol val="circle"/>
-            <c:size val="6"/>
-          </c:marker>
-          <c:cat>
-            <c:strLit>
-              <c:ptCount val="6"/>
-              <c:pt idx="0">
-                <c:v>A</c:v>
-              </c:pt>
-              <c:pt idx="1">
-                <c:v>B</c:v>
-              </c:pt>
-              <c:pt idx="2">
-                <c:v>C</c:v>
-              </c:pt>
-              <c:pt idx="3">
-                <c:v>D</c:v>
-              </c:pt>
-              <c:pt idx="4">
-                <c:v>E</c:v>
-              </c:pt>
-              <c:pt idx="5">
-                <c:v>F</c:v>
-              </c:pt>
-            </c:strLit>
-          </c:cat>
-          <c:val>
-            <c:numLit>
-              <c:formatCode>General</c:formatCode>
-              <c:ptCount val="6"/>
-              <c:pt idx="0">
-                <c:v>34</c:v>
-              </c:pt>
-              <c:pt idx="1">
-                <c:v>39</c:v>
-              </c:pt>
-              <c:pt idx="2">
-                <c:v>41</c:v>
-              </c:pt>
-              <c:pt idx="3">
-                <c:v>45</c:v>
-              </c:pt>
-              <c:pt idx="4">
-                <c:v>49</c:v>
-              </c:pt>
-              <c:pt idx="5">
-                <c:v>52</c:v>
-              </c:pt>
-            </c:numLit>
-          </c:val>
-        </c:ser>
-        <c:axId val="1"/>
-        <c:axId val="2"/>
-      </c:lineChart>
-      <c:catAx>
-        <c:axId val="1"/>
-        <c:scaling>
-          <c:orientation val="minMax"/>
-        </c:scaling>
-        <c:axPos val="b"/>
-        <c:crossAx val="2"/>
-      </c:catAx>
-      <c:valAx>
-        <c:axId val="2"/>
-        <c:scaling>
-          <c:orientation val="minMax"/>
-        </c:scaling>
-        <c:axPos val="l"/>
-        <c:crossAx val="1"/>
-      </c:valAx>
-    </c:plotArea>
-    <c:plotVisOnly val="1"/>
-  </c:chart>
-</c:chartSpace>
-</file>
-
 <file path=ppt/slides/slide1.xml><?xml version="1.0" encoding="utf-8"?>
 <p:sld xmlns:p="http://schemas.openxmlformats.org/presentationml/2006/main">
   <p:cSld name="Opening claim">
@@ -2611,101 +2106,616 @@
           </a:p>
         </p:txBody>
       </p:sp>
-      <p:graphicFrame>
-        <p:nvGraphicFramePr>
-          <p:cNvPr id="8" name="dense-primary-chart"/>
-          <p:cNvGraphicFramePr>
-            <a:graphicFrameLocks xmlns:a="http://schemas.openxmlformats.org/drawingml/2006/main" noGrp="1"/>
-          </p:cNvGraphicFramePr>
-          <p:nvPr/>
-        </p:nvGraphicFramePr>
-        <p:xfrm>
-          <a:off xmlns:a="http://schemas.openxmlformats.org/drawingml/2006/main" x="990600" y="3048000"/>
-          <a:ext xmlns:a="http://schemas.openxmlformats.org/drawingml/2006/main" cx="6286500" cy="2952750"/>
-        </p:xfrm>
-        <a:graphic xmlns:a="http://schemas.openxmlformats.org/drawingml/2006/main">
-          <a:graphicData uri="http://schemas.openxmlformats.org/drawingml/2006/chart">
-            <c:chart xmlns:r="http://schemas.openxmlformats.org/officeDocument/2006/relationships" xmlns:c="http://schemas.openxmlformats.org/drawingml/2006/chart" r:id="Rb8d4e27017884d8b"/>
-          </a:graphicData>
-        </a:graphic>
-      </p:graphicFrame>
-      <p:graphicFrame>
-        <p:nvGraphicFramePr>
-          <p:cNvPr id="9" name="dense-secondary-chart"/>
-          <p:cNvGraphicFramePr>
-            <a:graphicFrameLocks xmlns:a="http://schemas.openxmlformats.org/drawingml/2006/main" noGrp="1"/>
-          </p:cNvGraphicFramePr>
-          <p:nvPr/>
-        </p:nvGraphicFramePr>
-        <p:xfrm>
-          <a:off xmlns:a="http://schemas.openxmlformats.org/drawingml/2006/main" x="7658100" y="3048000"/>
-          <a:ext xmlns:a="http://schemas.openxmlformats.org/drawingml/2006/main" cx="3143250" cy="2952750"/>
-        </p:xfrm>
-        <a:graphic xmlns:a="http://schemas.openxmlformats.org/drawingml/2006/main">
-          <a:graphicData uri="http://schemas.openxmlformats.org/drawingml/2006/chart">
-            <c:chart xmlns:r="http://schemas.openxmlformats.org/officeDocument/2006/relationships" xmlns:c="http://schemas.openxmlformats.org/drawingml/2006/chart" r:id="Rc1aca8b3f0a441c4"/>
-          </a:graphicData>
-        </a:graphic>
-      </p:graphicFrame>
-      <p:sp>
-        <p:nvSpPr>
-          <p:cNvPr id="10" name="dense-read-rule"/>
-          <p:cNvSpPr/>
-          <p:nvPr/>
-        </p:nvSpPr>
-        <p:spPr>
-          <a:xfrm xmlns:a="http://schemas.openxmlformats.org/drawingml/2006/main">
-            <a:off x="11315700" y="3314700"/>
-            <a:ext cx="2686050" cy="0"/>
+      <p:sp>
+        <p:nvSpPr>
+          <p:cNvPr id="8" name="map-label"/>
+          <p:cNvSpPr txBox="1"/>
+          <p:nvPr/>
+        </p:nvSpPr>
+        <p:spPr>
+          <a:xfrm xmlns:a="http://schemas.openxmlformats.org/drawingml/2006/main">
+            <a:off x="1066800" y="3143250"/>
+            <a:ext cx="5143500" cy="209550"/>
+          </a:xfrm>
+          <a:prstGeom xmlns:a="http://schemas.openxmlformats.org/drawingml/2006/main" prst="rect">
+            <a:avLst/>
+          </a:prstGeom>
+          <a:noFill xmlns:a="http://schemas.openxmlformats.org/drawingml/2006/main"/>
+          <a:ln xmlns:a="http://schemas.openxmlformats.org/drawingml/2006/main" w="0">
+            <a:noFill/>
+          </a:ln>
+        </p:spPr>
+        <p:txBody>
+          <a:bodyPr xmlns:a="http://schemas.openxmlformats.org/drawingml/2006/main" wrap="square" lIns="0" tIns="0" rIns="0" bIns="0" anchor="t"/>
+          <a:lstStyle xmlns:a="http://schemas.openxmlformats.org/drawingml/2006/main"/>
+          <a:p xmlns:a="http://schemas.openxmlformats.org/drawingml/2006/main">
+            <a:r>
+              <a:rPr lang="en-US" sz="1050" b="1">
+                <a:solidFill>
+                  <a:srgbClr val="2278E8"/>
+                </a:solidFill>
+                <a:latin typeface="Inter"/>
+                <a:ea typeface="Inter"/>
+              </a:rPr>
+              <a:t>DIRECT-LABELLED DISTRIBUTION</a:t>
+            </a:r>
+            <a:endParaRPr lang="en-US"/>
+          </a:p>
+        </p:txBody>
+      </p:sp>
+      <p:sp>
+        <p:nvSpPr>
+          <p:cNvPr id="9" name="map-field"/>
+          <p:cNvSpPr/>
+          <p:nvPr/>
+        </p:nvSpPr>
+        <p:spPr>
+          <a:xfrm xmlns:a="http://schemas.openxmlformats.org/drawingml/2006/main">
+            <a:off x="1066800" y="3524250"/>
+            <a:ext cx="7524750" cy="2647950"/>
+          </a:xfrm>
+          <a:prstGeom xmlns:a="http://schemas.openxmlformats.org/drawingml/2006/main" prst="rect">
+            <a:avLst/>
+          </a:prstGeom>
+          <a:solidFill xmlns:a="http://schemas.openxmlformats.org/drawingml/2006/main">
+            <a:srgbClr val="F2E3EC"/>
+          </a:solidFill>
+          <a:ln xmlns:a="http://schemas.openxmlformats.org/drawingml/2006/main" w="12700">
+            <a:solidFill>
+              <a:srgbClr val="8F9B9E"/>
+            </a:solidFill>
+            <a:prstDash val="solid"/>
+          </a:ln>
+        </p:spPr>
+        <p:txBody>
+          <a:bodyPr xmlns:a="http://schemas.openxmlformats.org/drawingml/2006/main" wrap="square" lIns="0" tIns="0" rIns="0" bIns="0" anchor="t"/>
+          <a:lstStyle xmlns:a="http://schemas.openxmlformats.org/drawingml/2006/main"/>
+          <a:p xmlns:a="http://schemas.openxmlformats.org/drawingml/2006/main">
+            <a:r>
+              <a:rPr lang="en-US"/>
+              <a:t/>
+            </a:r>
+            <a:endParaRPr lang="en-US"/>
+          </a:p>
+        </p:txBody>
+      </p:sp>
+      <p:sp>
+        <p:nvSpPr>
+          <p:cNvPr id="10" name="map-region-0"/>
+          <p:cNvSpPr/>
+          <p:nvPr/>
+        </p:nvSpPr>
+        <p:spPr>
+          <a:xfrm xmlns:a="http://schemas.openxmlformats.org/drawingml/2006/main">
+            <a:off x="1619250" y="4324350"/>
+            <a:ext cx="1428750" cy="704850"/>
+          </a:xfrm>
+          <a:prstGeom xmlns:a="http://schemas.openxmlformats.org/drawingml/2006/main" prst="rect">
+            <a:avLst/>
+          </a:prstGeom>
+          <a:solidFill xmlns:a="http://schemas.openxmlformats.org/drawingml/2006/main">
+            <a:srgbClr val="B64A98">
+              <a:alpha val="48000"/>
+            </a:srgbClr>
+          </a:solidFill>
+          <a:ln xmlns:a="http://schemas.openxmlformats.org/drawingml/2006/main" w="25400">
+            <a:solidFill>
+              <a:srgbClr val="FCFCFA"/>
+            </a:solidFill>
+            <a:prstDash val="solid"/>
+          </a:ln>
+        </p:spPr>
+        <p:txBody>
+          <a:bodyPr xmlns:a="http://schemas.openxmlformats.org/drawingml/2006/main" wrap="square" lIns="0" tIns="0" rIns="0" bIns="0" anchor="t"/>
+          <a:lstStyle xmlns:a="http://schemas.openxmlformats.org/drawingml/2006/main"/>
+          <a:p xmlns:a="http://schemas.openxmlformats.org/drawingml/2006/main">
+            <a:r>
+              <a:rPr lang="en-US"/>
+              <a:t/>
+            </a:r>
+            <a:endParaRPr lang="en-US"/>
+          </a:p>
+        </p:txBody>
+      </p:sp>
+      <p:sp>
+        <p:nvSpPr>
+          <p:cNvPr id="11" name="map-region-1"/>
+          <p:cNvSpPr/>
+          <p:nvPr/>
+        </p:nvSpPr>
+        <p:spPr>
+          <a:xfrm xmlns:a="http://schemas.openxmlformats.org/drawingml/2006/main">
+            <a:off x="3295650" y="3962400"/>
+            <a:ext cx="1790700" cy="876300"/>
+          </a:xfrm>
+          <a:prstGeom xmlns:a="http://schemas.openxmlformats.org/drawingml/2006/main" prst="rect">
+            <a:avLst/>
+          </a:prstGeom>
+          <a:solidFill xmlns:a="http://schemas.openxmlformats.org/drawingml/2006/main">
+            <a:srgbClr val="2278E8">
+              <a:alpha val="76000"/>
+            </a:srgbClr>
+          </a:solidFill>
+          <a:ln xmlns:a="http://schemas.openxmlformats.org/drawingml/2006/main" w="25400">
+            <a:solidFill>
+              <a:srgbClr val="FCFCFA"/>
+            </a:solidFill>
+            <a:prstDash val="solid"/>
+          </a:ln>
+        </p:spPr>
+        <p:txBody>
+          <a:bodyPr xmlns:a="http://schemas.openxmlformats.org/drawingml/2006/main" wrap="square" lIns="0" tIns="0" rIns="0" bIns="0" anchor="t"/>
+          <a:lstStyle xmlns:a="http://schemas.openxmlformats.org/drawingml/2006/main"/>
+          <a:p xmlns:a="http://schemas.openxmlformats.org/drawingml/2006/main">
+            <a:r>
+              <a:rPr lang="en-US"/>
+              <a:t/>
+            </a:r>
+            <a:endParaRPr lang="en-US"/>
+          </a:p>
+        </p:txBody>
+      </p:sp>
+      <p:sp>
+        <p:nvSpPr>
+          <p:cNvPr id="12" name="map-region-2"/>
+          <p:cNvSpPr/>
+          <p:nvPr/>
+        </p:nvSpPr>
+        <p:spPr>
+          <a:xfrm xmlns:a="http://schemas.openxmlformats.org/drawingml/2006/main">
+            <a:off x="5295900" y="4457700"/>
+            <a:ext cx="1200150" cy="666750"/>
+          </a:xfrm>
+          <a:prstGeom xmlns:a="http://schemas.openxmlformats.org/drawingml/2006/main" prst="rect">
+            <a:avLst/>
+          </a:prstGeom>
+          <a:solidFill xmlns:a="http://schemas.openxmlformats.org/drawingml/2006/main">
+            <a:srgbClr val="B64A98">
+              <a:alpha val="48000"/>
+            </a:srgbClr>
+          </a:solidFill>
+          <a:ln xmlns:a="http://schemas.openxmlformats.org/drawingml/2006/main" w="25400">
+            <a:solidFill>
+              <a:srgbClr val="FCFCFA"/>
+            </a:solidFill>
+            <a:prstDash val="solid"/>
+          </a:ln>
+        </p:spPr>
+        <p:txBody>
+          <a:bodyPr xmlns:a="http://schemas.openxmlformats.org/drawingml/2006/main" wrap="square" lIns="0" tIns="0" rIns="0" bIns="0" anchor="t"/>
+          <a:lstStyle xmlns:a="http://schemas.openxmlformats.org/drawingml/2006/main"/>
+          <a:p xmlns:a="http://schemas.openxmlformats.org/drawingml/2006/main">
+            <a:r>
+              <a:rPr lang="en-US"/>
+              <a:t/>
+            </a:r>
+            <a:endParaRPr lang="en-US"/>
+          </a:p>
+        </p:txBody>
+      </p:sp>
+      <p:sp>
+        <p:nvSpPr>
+          <p:cNvPr id="13" name="map-region-3"/>
+          <p:cNvSpPr/>
+          <p:nvPr/>
+        </p:nvSpPr>
+        <p:spPr>
+          <a:xfrm xmlns:a="http://schemas.openxmlformats.org/drawingml/2006/main">
+            <a:off x="6705600" y="3848100"/>
+            <a:ext cx="1238250" cy="952500"/>
+          </a:xfrm>
+          <a:prstGeom xmlns:a="http://schemas.openxmlformats.org/drawingml/2006/main" prst="rect">
+            <a:avLst/>
+          </a:prstGeom>
+          <a:solidFill xmlns:a="http://schemas.openxmlformats.org/drawingml/2006/main">
+            <a:srgbClr val="2278E8">
+              <a:alpha val="76000"/>
+            </a:srgbClr>
+          </a:solidFill>
+          <a:ln xmlns:a="http://schemas.openxmlformats.org/drawingml/2006/main" w="25400">
+            <a:solidFill>
+              <a:srgbClr val="FCFCFA"/>
+            </a:solidFill>
+            <a:prstDash val="solid"/>
+          </a:ln>
+        </p:spPr>
+        <p:txBody>
+          <a:bodyPr xmlns:a="http://schemas.openxmlformats.org/drawingml/2006/main" wrap="square" lIns="0" tIns="0" rIns="0" bIns="0" anchor="t"/>
+          <a:lstStyle xmlns:a="http://schemas.openxmlformats.org/drawingml/2006/main"/>
+          <a:p xmlns:a="http://schemas.openxmlformats.org/drawingml/2006/main">
+            <a:r>
+              <a:rPr lang="en-US"/>
+              <a:t/>
+            </a:r>
+            <a:endParaRPr lang="en-US"/>
+          </a:p>
+        </p:txBody>
+      </p:sp>
+      <p:sp>
+        <p:nvSpPr>
+          <p:cNvPr id="14" name="map-region-4"/>
+          <p:cNvSpPr/>
+          <p:nvPr/>
+        </p:nvSpPr>
+        <p:spPr>
+          <a:xfrm xmlns:a="http://schemas.openxmlformats.org/drawingml/2006/main">
+            <a:off x="2590800" y="5219700"/>
+            <a:ext cx="1943100" cy="590550"/>
+          </a:xfrm>
+          <a:prstGeom xmlns:a="http://schemas.openxmlformats.org/drawingml/2006/main" prst="rect">
+            <a:avLst/>
+          </a:prstGeom>
+          <a:solidFill xmlns:a="http://schemas.openxmlformats.org/drawingml/2006/main">
+            <a:srgbClr val="8F9B9E">
+              <a:alpha val="48000"/>
+            </a:srgbClr>
+          </a:solidFill>
+          <a:ln xmlns:a="http://schemas.openxmlformats.org/drawingml/2006/main" w="25400">
+            <a:solidFill>
+              <a:srgbClr val="FCFCFA"/>
+            </a:solidFill>
+            <a:prstDash val="solid"/>
+          </a:ln>
+        </p:spPr>
+        <p:txBody>
+          <a:bodyPr xmlns:a="http://schemas.openxmlformats.org/drawingml/2006/main" wrap="square" lIns="0" tIns="0" rIns="0" bIns="0" anchor="t"/>
+          <a:lstStyle xmlns:a="http://schemas.openxmlformats.org/drawingml/2006/main"/>
+          <a:p xmlns:a="http://schemas.openxmlformats.org/drawingml/2006/main">
+            <a:r>
+              <a:rPr lang="en-US"/>
+              <a:t/>
+            </a:r>
+            <a:endParaRPr lang="en-US"/>
+          </a:p>
+        </p:txBody>
+      </p:sp>
+      <p:sp>
+        <p:nvSpPr>
+          <p:cNvPr id="15" name="map-region-5"/>
+          <p:cNvSpPr/>
+          <p:nvPr/>
+        </p:nvSpPr>
+        <p:spPr>
+          <a:xfrm xmlns:a="http://schemas.openxmlformats.org/drawingml/2006/main">
+            <a:off x="4895850" y="5334000"/>
+            <a:ext cx="1447800" cy="514350"/>
+          </a:xfrm>
+          <a:prstGeom xmlns:a="http://schemas.openxmlformats.org/drawingml/2006/main" prst="rect">
+            <a:avLst/>
+          </a:prstGeom>
+          <a:solidFill xmlns:a="http://schemas.openxmlformats.org/drawingml/2006/main">
+            <a:srgbClr val="B64A98">
+              <a:alpha val="76000"/>
+            </a:srgbClr>
+          </a:solidFill>
+          <a:ln xmlns:a="http://schemas.openxmlformats.org/drawingml/2006/main" w="25400">
+            <a:solidFill>
+              <a:srgbClr val="FCFCFA"/>
+            </a:solidFill>
+            <a:prstDash val="solid"/>
+          </a:ln>
+        </p:spPr>
+        <p:txBody>
+          <a:bodyPr xmlns:a="http://schemas.openxmlformats.org/drawingml/2006/main" wrap="square" lIns="0" tIns="0" rIns="0" bIns="0" anchor="t"/>
+          <a:lstStyle xmlns:a="http://schemas.openxmlformats.org/drawingml/2006/main"/>
+          <a:p xmlns:a="http://schemas.openxmlformats.org/drawingml/2006/main">
+            <a:r>
+              <a:rPr lang="en-US"/>
+              <a:t/>
+            </a:r>
+            <a:endParaRPr lang="en-US"/>
+          </a:p>
+        </p:txBody>
+      </p:sp>
+      <p:sp>
+        <p:nvSpPr>
+          <p:cNvPr id="16" name="map-leader-0"/>
+          <p:cNvSpPr/>
+          <p:nvPr/>
+        </p:nvSpPr>
+        <p:spPr>
+          <a:xfrm xmlns:a="http://schemas.openxmlformats.org/drawingml/2006/main">
+            <a:off x="1943100" y="4362450"/>
+            <a:ext cx="209550" cy="228600"/>
           </a:xfrm>
           <a:prstGeom xmlns:a="http://schemas.openxmlformats.org/drawingml/2006/main" prst="line">
             <a:avLst/>
           </a:prstGeom>
           <a:noFill xmlns:a="http://schemas.openxmlformats.org/drawingml/2006/main"/>
-          <a:ln xmlns:a="http://schemas.openxmlformats.org/drawingml/2006/main" w="38100">
-            <a:solidFill>
-              <a:srgbClr val="2278E8"/>
-            </a:solidFill>
-            <a:prstDash val="solid"/>
-          </a:ln>
-        </p:spPr>
-        <p:txBody>
-          <a:bodyPr xmlns:a="http://schemas.openxmlformats.org/drawingml/2006/main" wrap="square" lIns="0" tIns="0" rIns="0" bIns="0" anchor="t"/>
-          <a:lstStyle xmlns:a="http://schemas.openxmlformats.org/drawingml/2006/main"/>
-          <a:p xmlns:a="http://schemas.openxmlformats.org/drawingml/2006/main">
-            <a:r>
-              <a:rPr lang="en-US"/>
-              <a:t/>
-            </a:r>
-            <a:endParaRPr lang="en-US"/>
-          </a:p>
-        </p:txBody>
-      </p:sp>
-      <p:sp>
-        <p:nvSpPr>
-          <p:cNvPr id="11" name="dense-read-label"/>
-          <p:cNvSpPr txBox="1"/>
-          <p:nvPr/>
-        </p:nvSpPr>
-        <p:spPr>
-          <a:xfrm xmlns:a="http://schemas.openxmlformats.org/drawingml/2006/main">
-            <a:off x="11315700" y="3543300"/>
-            <a:ext cx="2667000" cy="209550"/>
-          </a:xfrm>
-          <a:prstGeom xmlns:a="http://schemas.openxmlformats.org/drawingml/2006/main" prst="rect">
-            <a:avLst/>
-          </a:prstGeom>
-          <a:noFill xmlns:a="http://schemas.openxmlformats.org/drawingml/2006/main"/>
-          <a:ln xmlns:a="http://schemas.openxmlformats.org/drawingml/2006/main" w="0">
-            <a:noFill/>
-          </a:ln>
-        </p:spPr>
-        <p:txBody>
-          <a:bodyPr xmlns:a="http://schemas.openxmlformats.org/drawingml/2006/main" wrap="square" lIns="0" tIns="0" rIns="0" bIns="0" anchor="t"/>
-          <a:lstStyle xmlns:a="http://schemas.openxmlformats.org/drawingml/2006/main"/>
-          <a:p xmlns:a="http://schemas.openxmlformats.org/drawingml/2006/main">
-            <a:r>
-              <a:rPr lang="en-US" sz="1050" b="1">
+          <a:ln xmlns:a="http://schemas.openxmlformats.org/drawingml/2006/main" w="12700">
+            <a:solidFill>
+              <a:srgbClr val="18313A"/>
+            </a:solidFill>
+            <a:prstDash val="solid"/>
+          </a:ln>
+        </p:spPr>
+        <p:txBody>
+          <a:bodyPr xmlns:a="http://schemas.openxmlformats.org/drawingml/2006/main" wrap="square" lIns="0" tIns="0" rIns="0" bIns="0" anchor="t"/>
+          <a:lstStyle xmlns:a="http://schemas.openxmlformats.org/drawingml/2006/main"/>
+          <a:p xmlns:a="http://schemas.openxmlformats.org/drawingml/2006/main">
+            <a:r>
+              <a:rPr lang="en-US"/>
+              <a:t/>
+            </a:r>
+            <a:endParaRPr lang="en-US"/>
+          </a:p>
+        </p:txBody>
+      </p:sp>
+      <p:sp>
+        <p:nvSpPr>
+          <p:cNvPr id="17" name="map-label-0"/>
+          <p:cNvSpPr txBox="1"/>
+          <p:nvPr/>
+        </p:nvSpPr>
+        <p:spPr>
+          <a:xfrm xmlns:a="http://schemas.openxmlformats.org/drawingml/2006/main">
+            <a:off x="2190750" y="4095750"/>
+            <a:ext cx="1428750" cy="228600"/>
+          </a:xfrm>
+          <a:prstGeom xmlns:a="http://schemas.openxmlformats.org/drawingml/2006/main" prst="rect">
+            <a:avLst/>
+          </a:prstGeom>
+          <a:noFill xmlns:a="http://schemas.openxmlformats.org/drawingml/2006/main"/>
+          <a:ln xmlns:a="http://schemas.openxmlformats.org/drawingml/2006/main" w="0">
+            <a:noFill/>
+          </a:ln>
+        </p:spPr>
+        <p:txBody>
+          <a:bodyPr xmlns:a="http://schemas.openxmlformats.org/drawingml/2006/main" wrap="square" lIns="0" tIns="0" rIns="0" bIns="0" anchor="t"/>
+          <a:lstStyle xmlns:a="http://schemas.openxmlformats.org/drawingml/2006/main"/>
+          <a:p xmlns:a="http://schemas.openxmlformats.org/drawingml/2006/main">
+            <a:r>
+              <a:rPr lang="en-US" sz="1125" b="1">
+                <a:solidFill>
+                  <a:srgbClr val="18313A"/>
+                </a:solidFill>
+                <a:latin typeface="Inter"/>
+                <a:ea typeface="Inter"/>
+              </a:rPr>
+              <a:t>North · 42%</a:t>
+            </a:r>
+            <a:endParaRPr lang="en-US"/>
+          </a:p>
+        </p:txBody>
+      </p:sp>
+      <p:sp>
+        <p:nvSpPr>
+          <p:cNvPr id="18" name="map-leader-1"/>
+          <p:cNvSpPr/>
+          <p:nvPr/>
+        </p:nvSpPr>
+        <p:spPr>
+          <a:xfrm xmlns:a="http://schemas.openxmlformats.org/drawingml/2006/main">
+            <a:off x="3676650" y="3981450"/>
+            <a:ext cx="209550" cy="228600"/>
+          </a:xfrm>
+          <a:prstGeom xmlns:a="http://schemas.openxmlformats.org/drawingml/2006/main" prst="line">
+            <a:avLst/>
+          </a:prstGeom>
+          <a:noFill xmlns:a="http://schemas.openxmlformats.org/drawingml/2006/main"/>
+          <a:ln xmlns:a="http://schemas.openxmlformats.org/drawingml/2006/main" w="12700">
+            <a:solidFill>
+              <a:srgbClr val="18313A"/>
+            </a:solidFill>
+            <a:prstDash val="solid"/>
+          </a:ln>
+        </p:spPr>
+        <p:txBody>
+          <a:bodyPr xmlns:a="http://schemas.openxmlformats.org/drawingml/2006/main" wrap="square" lIns="0" tIns="0" rIns="0" bIns="0" anchor="t"/>
+          <a:lstStyle xmlns:a="http://schemas.openxmlformats.org/drawingml/2006/main"/>
+          <a:p xmlns:a="http://schemas.openxmlformats.org/drawingml/2006/main">
+            <a:r>
+              <a:rPr lang="en-US"/>
+              <a:t/>
+            </a:r>
+            <a:endParaRPr lang="en-US"/>
+          </a:p>
+        </p:txBody>
+      </p:sp>
+      <p:sp>
+        <p:nvSpPr>
+          <p:cNvPr id="19" name="map-label-1"/>
+          <p:cNvSpPr txBox="1"/>
+          <p:nvPr/>
+        </p:nvSpPr>
+        <p:spPr>
+          <a:xfrm xmlns:a="http://schemas.openxmlformats.org/drawingml/2006/main">
+            <a:off x="3924300" y="3714750"/>
+            <a:ext cx="1428750" cy="228600"/>
+          </a:xfrm>
+          <a:prstGeom xmlns:a="http://schemas.openxmlformats.org/drawingml/2006/main" prst="rect">
+            <a:avLst/>
+          </a:prstGeom>
+          <a:noFill xmlns:a="http://schemas.openxmlformats.org/drawingml/2006/main"/>
+          <a:ln xmlns:a="http://schemas.openxmlformats.org/drawingml/2006/main" w="0">
+            <a:noFill/>
+          </a:ln>
+        </p:spPr>
+        <p:txBody>
+          <a:bodyPr xmlns:a="http://schemas.openxmlformats.org/drawingml/2006/main" wrap="square" lIns="0" tIns="0" rIns="0" bIns="0" anchor="t"/>
+          <a:lstStyle xmlns:a="http://schemas.openxmlformats.org/drawingml/2006/main"/>
+          <a:p xmlns:a="http://schemas.openxmlformats.org/drawingml/2006/main">
+            <a:r>
+              <a:rPr lang="en-US" sz="1125" b="1">
+                <a:solidFill>
+                  <a:srgbClr val="18313A"/>
+                </a:solidFill>
+                <a:latin typeface="Inter"/>
+                <a:ea typeface="Inter"/>
+              </a:rPr>
+              <a:t>Central · 68%</a:t>
+            </a:r>
+            <a:endParaRPr lang="en-US"/>
+          </a:p>
+        </p:txBody>
+      </p:sp>
+      <p:sp>
+        <p:nvSpPr>
+          <p:cNvPr id="20" name="map-leader-2"/>
+          <p:cNvSpPr/>
+          <p:nvPr/>
+        </p:nvSpPr>
+        <p:spPr>
+          <a:xfrm xmlns:a="http://schemas.openxmlformats.org/drawingml/2006/main">
+            <a:off x="6934200" y="3886200"/>
+            <a:ext cx="209550" cy="228600"/>
+          </a:xfrm>
+          <a:prstGeom xmlns:a="http://schemas.openxmlformats.org/drawingml/2006/main" prst="line">
+            <a:avLst/>
+          </a:prstGeom>
+          <a:noFill xmlns:a="http://schemas.openxmlformats.org/drawingml/2006/main"/>
+          <a:ln xmlns:a="http://schemas.openxmlformats.org/drawingml/2006/main" w="12700">
+            <a:solidFill>
+              <a:srgbClr val="18313A"/>
+            </a:solidFill>
+            <a:prstDash val="solid"/>
+          </a:ln>
+        </p:spPr>
+        <p:txBody>
+          <a:bodyPr xmlns:a="http://schemas.openxmlformats.org/drawingml/2006/main" wrap="square" lIns="0" tIns="0" rIns="0" bIns="0" anchor="t"/>
+          <a:lstStyle xmlns:a="http://schemas.openxmlformats.org/drawingml/2006/main"/>
+          <a:p xmlns:a="http://schemas.openxmlformats.org/drawingml/2006/main">
+            <a:r>
+              <a:rPr lang="en-US"/>
+              <a:t/>
+            </a:r>
+            <a:endParaRPr lang="en-US"/>
+          </a:p>
+        </p:txBody>
+      </p:sp>
+      <p:sp>
+        <p:nvSpPr>
+          <p:cNvPr id="21" name="map-label-2"/>
+          <p:cNvSpPr txBox="1"/>
+          <p:nvPr/>
+        </p:nvSpPr>
+        <p:spPr>
+          <a:xfrm xmlns:a="http://schemas.openxmlformats.org/drawingml/2006/main">
+            <a:off x="7181850" y="3619500"/>
+            <a:ext cx="1428750" cy="228600"/>
+          </a:xfrm>
+          <a:prstGeom xmlns:a="http://schemas.openxmlformats.org/drawingml/2006/main" prst="rect">
+            <a:avLst/>
+          </a:prstGeom>
+          <a:noFill xmlns:a="http://schemas.openxmlformats.org/drawingml/2006/main"/>
+          <a:ln xmlns:a="http://schemas.openxmlformats.org/drawingml/2006/main" w="0">
+            <a:noFill/>
+          </a:ln>
+        </p:spPr>
+        <p:txBody>
+          <a:bodyPr xmlns:a="http://schemas.openxmlformats.org/drawingml/2006/main" wrap="square" lIns="0" tIns="0" rIns="0" bIns="0" anchor="t"/>
+          <a:lstStyle xmlns:a="http://schemas.openxmlformats.org/drawingml/2006/main"/>
+          <a:p xmlns:a="http://schemas.openxmlformats.org/drawingml/2006/main">
+            <a:r>
+              <a:rPr lang="en-US" sz="1125" b="1">
+                <a:solidFill>
+                  <a:srgbClr val="18313A"/>
+                </a:solidFill>
+                <a:latin typeface="Inter"/>
+                <a:ea typeface="Inter"/>
+              </a:rPr>
+              <a:t>East · 55%</a:t>
+            </a:r>
+            <a:endParaRPr lang="en-US"/>
+          </a:p>
+        </p:txBody>
+      </p:sp>
+      <p:sp>
+        <p:nvSpPr>
+          <p:cNvPr id="22" name="map-leader-3"/>
+          <p:cNvSpPr/>
+          <p:nvPr/>
+        </p:nvSpPr>
+        <p:spPr>
+          <a:xfrm xmlns:a="http://schemas.openxmlformats.org/drawingml/2006/main">
+            <a:off x="2952750" y="6343650"/>
+            <a:ext cx="209550" cy="228600"/>
+          </a:xfrm>
+          <a:prstGeom xmlns:a="http://schemas.openxmlformats.org/drawingml/2006/main" prst="line">
+            <a:avLst/>
+          </a:prstGeom>
+          <a:noFill xmlns:a="http://schemas.openxmlformats.org/drawingml/2006/main"/>
+          <a:ln xmlns:a="http://schemas.openxmlformats.org/drawingml/2006/main" w="12700">
+            <a:solidFill>
+              <a:srgbClr val="18313A"/>
+            </a:solidFill>
+            <a:prstDash val="solid"/>
+          </a:ln>
+        </p:spPr>
+        <p:txBody>
+          <a:bodyPr xmlns:a="http://schemas.openxmlformats.org/drawingml/2006/main" wrap="square" lIns="0" tIns="0" rIns="0" bIns="0" anchor="t"/>
+          <a:lstStyle xmlns:a="http://schemas.openxmlformats.org/drawingml/2006/main"/>
+          <a:p xmlns:a="http://schemas.openxmlformats.org/drawingml/2006/main">
+            <a:r>
+              <a:rPr lang="en-US"/>
+              <a:t/>
+            </a:r>
+            <a:endParaRPr lang="en-US"/>
+          </a:p>
+        </p:txBody>
+      </p:sp>
+      <p:sp>
+        <p:nvSpPr>
+          <p:cNvPr id="23" name="map-label-3"/>
+          <p:cNvSpPr txBox="1"/>
+          <p:nvPr/>
+        </p:nvSpPr>
+        <p:spPr>
+          <a:xfrm xmlns:a="http://schemas.openxmlformats.org/drawingml/2006/main">
+            <a:off x="3200400" y="6076950"/>
+            <a:ext cx="1428750" cy="228600"/>
+          </a:xfrm>
+          <a:prstGeom xmlns:a="http://schemas.openxmlformats.org/drawingml/2006/main" prst="rect">
+            <a:avLst/>
+          </a:prstGeom>
+          <a:noFill xmlns:a="http://schemas.openxmlformats.org/drawingml/2006/main"/>
+          <a:ln xmlns:a="http://schemas.openxmlformats.org/drawingml/2006/main" w="0">
+            <a:noFill/>
+          </a:ln>
+        </p:spPr>
+        <p:txBody>
+          <a:bodyPr xmlns:a="http://schemas.openxmlformats.org/drawingml/2006/main" wrap="square" lIns="0" tIns="0" rIns="0" bIns="0" anchor="t"/>
+          <a:lstStyle xmlns:a="http://schemas.openxmlformats.org/drawingml/2006/main"/>
+          <a:p xmlns:a="http://schemas.openxmlformats.org/drawingml/2006/main">
+            <a:r>
+              <a:rPr lang="en-US" sz="1125" b="1">
+                <a:solidFill>
+                  <a:srgbClr val="18313A"/>
+                </a:solidFill>
+                <a:latin typeface="Inter"/>
+                <a:ea typeface="Inter"/>
+              </a:rPr>
+              <a:t>South · 31%</a:t>
+            </a:r>
+            <a:endParaRPr lang="en-US"/>
+          </a:p>
+        </p:txBody>
+      </p:sp>
+      <p:sp>
+        <p:nvSpPr>
+          <p:cNvPr id="24" name="map-read-label"/>
+          <p:cNvSpPr txBox="1"/>
+          <p:nvPr/>
+        </p:nvSpPr>
+        <p:spPr>
+          <a:xfrm xmlns:a="http://schemas.openxmlformats.org/drawingml/2006/main">
+            <a:off x="9906000" y="3333750"/>
+            <a:ext cx="3048000" cy="228600"/>
+          </a:xfrm>
+          <a:prstGeom xmlns:a="http://schemas.openxmlformats.org/drawingml/2006/main" prst="rect">
+            <a:avLst/>
+          </a:prstGeom>
+          <a:noFill xmlns:a="http://schemas.openxmlformats.org/drawingml/2006/main"/>
+          <a:ln xmlns:a="http://schemas.openxmlformats.org/drawingml/2006/main" w="0">
+            <a:noFill/>
+          </a:ln>
+        </p:spPr>
+        <p:txBody>
+          <a:bodyPr xmlns:a="http://schemas.openxmlformats.org/drawingml/2006/main" wrap="square" lIns="0" tIns="0" rIns="0" bIns="0" anchor="t"/>
+          <a:lstStyle xmlns:a="http://schemas.openxmlformats.org/drawingml/2006/main"/>
+          <a:p xmlns:a="http://schemas.openxmlformats.org/drawingml/2006/main">
+            <a:r>
+              <a:rPr lang="en-US" sz="1125" b="1">
                 <a:solidFill>
                   <a:srgbClr val="2278E8"/>
                 </a:solidFill>
@@ -2720,81 +2730,81 @@
       </p:sp>
       <p:sp>
         <p:nvSpPr>
-          <p:cNvPr id="12" name="dense-read-title"/>
-          <p:cNvSpPr txBox="1"/>
-          <p:nvPr/>
-        </p:nvSpPr>
-        <p:spPr>
-          <a:xfrm xmlns:a="http://schemas.openxmlformats.org/drawingml/2006/main">
-            <a:off x="11315700" y="4000500"/>
-            <a:ext cx="2667000" cy="685800"/>
-          </a:xfrm>
-          <a:prstGeom xmlns:a="http://schemas.openxmlformats.org/drawingml/2006/main" prst="rect">
-            <a:avLst/>
-          </a:prstGeom>
-          <a:noFill xmlns:a="http://schemas.openxmlformats.org/drawingml/2006/main"/>
-          <a:ln xmlns:a="http://schemas.openxmlformats.org/drawingml/2006/main" w="0">
-            <a:noFill/>
-          </a:ln>
-        </p:spPr>
-        <p:txBody>
-          <a:bodyPr xmlns:a="http://schemas.openxmlformats.org/drawingml/2006/main" wrap="square" lIns="0" tIns="0" rIns="0" bIns="0" anchor="t"/>
-          <a:lstStyle xmlns:a="http://schemas.openxmlformats.org/drawingml/2006/main"/>
-          <a:p xmlns:a="http://schemas.openxmlformats.org/drawingml/2006/main">
-            <a:r>
-              <a:rPr lang="en-US" sz="1725" b="1">
+          <p:cNvPr id="25" name="map-read-title"/>
+          <p:cNvSpPr txBox="1"/>
+          <p:nvPr/>
+        </p:nvSpPr>
+        <p:spPr>
+          <a:xfrm xmlns:a="http://schemas.openxmlformats.org/drawingml/2006/main">
+            <a:off x="9906000" y="3829050"/>
+            <a:ext cx="3429000" cy="723900"/>
+          </a:xfrm>
+          <a:prstGeom xmlns:a="http://schemas.openxmlformats.org/drawingml/2006/main" prst="rect">
+            <a:avLst/>
+          </a:prstGeom>
+          <a:noFill xmlns:a="http://schemas.openxmlformats.org/drawingml/2006/main"/>
+          <a:ln xmlns:a="http://schemas.openxmlformats.org/drawingml/2006/main" w="0">
+            <a:noFill/>
+          </a:ln>
+        </p:spPr>
+        <p:txBody>
+          <a:bodyPr xmlns:a="http://schemas.openxmlformats.org/drawingml/2006/main" wrap="square" lIns="0" tIns="0" rIns="0" bIns="0" anchor="t"/>
+          <a:lstStyle xmlns:a="http://schemas.openxmlformats.org/drawingml/2006/main"/>
+          <a:p xmlns:a="http://schemas.openxmlformats.org/drawingml/2006/main">
+            <a:r>
+              <a:rPr lang="en-US" sz="2100" b="1">
                 <a:solidFill>
                   <a:srgbClr val="18313A"/>
                 </a:solidFill>
                 <a:latin typeface="Inter"/>
                 <a:ea typeface="Inter"/>
               </a:rPr>
-              <a:t>The pattern is bounded by the method.</a:t>
-            </a:r>
-            <a:endParaRPr lang="en-US"/>
-          </a:p>
-        </p:txBody>
-      </p:sp>
-      <p:sp>
-        <p:nvSpPr>
-          <p:cNvPr id="13" name="dense-read-body"/>
-          <p:cNvSpPr txBox="1"/>
-          <p:nvPr/>
-        </p:nvSpPr>
-        <p:spPr>
-          <a:xfrm xmlns:a="http://schemas.openxmlformats.org/drawingml/2006/main">
-            <a:off x="11315700" y="4953000"/>
-            <a:ext cx="2667000" cy="819150"/>
-          </a:xfrm>
-          <a:prstGeom xmlns:a="http://schemas.openxmlformats.org/drawingml/2006/main" prst="rect">
-            <a:avLst/>
-          </a:prstGeom>
-          <a:noFill xmlns:a="http://schemas.openxmlformats.org/drawingml/2006/main"/>
-          <a:ln xmlns:a="http://schemas.openxmlformats.org/drawingml/2006/main" w="0">
-            <a:noFill/>
-          </a:ln>
-        </p:spPr>
-        <p:txBody>
-          <a:bodyPr xmlns:a="http://schemas.openxmlformats.org/drawingml/2006/main" wrap="square" lIns="0" tIns="0" rIns="0" bIns="0" anchor="t"/>
-          <a:lstStyle xmlns:a="http://schemas.openxmlformats.org/drawingml/2006/main"/>
-          <a:p xmlns:a="http://schemas.openxmlformats.org/drawingml/2006/main">
-            <a:r>
-              <a:rPr lang="en-US" sz="1200">
+              <a:t>The geography changes the decision.</a:t>
+            </a:r>
+            <a:endParaRPr lang="en-US"/>
+          </a:p>
+        </p:txBody>
+      </p:sp>
+      <p:sp>
+        <p:nvSpPr>
+          <p:cNvPr id="26" name="map-read-body"/>
+          <p:cNvSpPr txBox="1"/>
+          <p:nvPr/>
+        </p:nvSpPr>
+        <p:spPr>
+          <a:xfrm xmlns:a="http://schemas.openxmlformats.org/drawingml/2006/main">
+            <a:off x="9906000" y="4953000"/>
+            <a:ext cx="3429000" cy="895350"/>
+          </a:xfrm>
+          <a:prstGeom xmlns:a="http://schemas.openxmlformats.org/drawingml/2006/main" prst="rect">
+            <a:avLst/>
+          </a:prstGeom>
+          <a:noFill xmlns:a="http://schemas.openxmlformats.org/drawingml/2006/main"/>
+          <a:ln xmlns:a="http://schemas.openxmlformats.org/drawingml/2006/main" w="0">
+            <a:noFill/>
+          </a:ln>
+        </p:spPr>
+        <p:txBody>
+          <a:bodyPr xmlns:a="http://schemas.openxmlformats.org/drawingml/2006/main" wrap="square" lIns="0" tIns="0" rIns="0" bIns="0" anchor="t"/>
+          <a:lstStyle xmlns:a="http://schemas.openxmlformats.org/drawingml/2006/main"/>
+          <a:p xmlns:a="http://schemas.openxmlformats.org/drawingml/2006/main">
+            <a:r>
+              <a:rPr lang="en-US" sz="1275">
                 <a:solidFill>
                   <a:srgbClr val="8F9B9E"/>
                 </a:solidFill>
                 <a:latin typeface="Inter"/>
                 <a:ea typeface="Inter"/>
               </a:rPr>
-              <a:t>Read the curve, then check the sample and limitation.</a:t>
-            </a:r>
-            <a:endParaRPr lang="en-US"/>
-          </a:p>
-        </p:txBody>
-      </p:sp>
-      <p:sp>
-        <p:nvSpPr>
-          <p:cNvPr id="14" name="evidence-band"/>
+              <a:t>Use a map only when position, distribution, or concentration carries the argument. Direct labels stay next to the region they qualify.</a:t>
+            </a:r>
+            <a:endParaRPr lang="en-US"/>
+          </a:p>
+        </p:txBody>
+      </p:sp>
+      <p:sp>
+        <p:nvSpPr>
+          <p:cNvPr id="27" name="evidence-band"/>
           <p:cNvSpPr/>
           <p:nvPr/>
         </p:nvSpPr>
@@ -2830,7 +2840,7 @@
       </p:sp>
       <p:sp>
         <p:nvSpPr>
-          <p:cNvPr id="15" name="evidence-band-text"/>
+          <p:cNvPr id="28" name="evidence-band-text"/>
           <p:cNvSpPr txBox="1"/>
           <p:nvPr/>
         </p:nvSpPr>
@@ -2867,7 +2877,7 @@
       </p:sp>
       <p:sp>
         <p:nvSpPr>
-          <p:cNvPr id="16" name="source"/>
+          <p:cNvPr id="29" name="source"/>
           <p:cNvSpPr txBox="1"/>
           <p:nvPr/>
         </p:nvSpPr>
@@ -2904,7 +2914,7 @@
       </p:sp>
       <p:sp>
         <p:nvSpPr>
-          <p:cNvPr id="17" name="page-number"/>
+          <p:cNvPr id="30" name="page-number"/>
           <p:cNvSpPr txBox="1"/>
           <p:nvPr/>
         </p:nvSpPr>
@@ -4116,45 +4126,705 @@
           </a:p>
         </p:txBody>
       </p:sp>
-      <p:graphicFrame>
-        <p:nvGraphicFramePr>
-          <p:cNvPr id="8" name="dense-visual-bars"/>
-          <p:cNvGraphicFramePr>
-            <a:graphicFrameLocks xmlns:a="http://schemas.openxmlformats.org/drawingml/2006/main" noGrp="1"/>
-          </p:cNvGraphicFramePr>
-          <p:nvPr/>
-        </p:nvGraphicFramePr>
-        <p:xfrm>
-          <a:off xmlns:a="http://schemas.openxmlformats.org/drawingml/2006/main" x="914400" y="3028950"/>
-          <a:ext xmlns:a="http://schemas.openxmlformats.org/drawingml/2006/main" cx="5334000" cy="3143250"/>
-        </p:xfrm>
-        <a:graphic xmlns:a="http://schemas.openxmlformats.org/drawingml/2006/main">
-          <a:graphicData uri="http://schemas.openxmlformats.org/drawingml/2006/chart">
-            <c:chart xmlns:r="http://schemas.openxmlformats.org/officeDocument/2006/relationships" xmlns:c="http://schemas.openxmlformats.org/drawingml/2006/chart" r:id="R12cd84b3632d43fa"/>
-          </a:graphicData>
-        </a:graphic>
-      </p:graphicFrame>
-      <p:graphicFrame>
-        <p:nvGraphicFramePr>
-          <p:cNvPr id="9" name="dense-visual-line"/>
-          <p:cNvGraphicFramePr>
-            <a:graphicFrameLocks xmlns:a="http://schemas.openxmlformats.org/drawingml/2006/main" noGrp="1"/>
-          </p:cNvGraphicFramePr>
-          <p:nvPr/>
-        </p:nvGraphicFramePr>
-        <p:xfrm>
-          <a:off xmlns:a="http://schemas.openxmlformats.org/drawingml/2006/main" x="6667500" y="3028950"/>
-          <a:ext xmlns:a="http://schemas.openxmlformats.org/drawingml/2006/main" cx="3810000" cy="3143250"/>
-        </p:xfrm>
-        <a:graphic xmlns:a="http://schemas.openxmlformats.org/drawingml/2006/main">
-          <a:graphicData uri="http://schemas.openxmlformats.org/drawingml/2006/chart">
-            <c:chart xmlns:r="http://schemas.openxmlformats.org/officeDocument/2006/relationships" xmlns:c="http://schemas.openxmlformats.org/drawingml/2006/chart" r:id="R7135a8525b7d4b76"/>
-          </a:graphicData>
-        </a:graphic>
-      </p:graphicFrame>
-      <p:sp>
-        <p:nvSpPr>
-          <p:cNvPr id="10" name="visual-note"/>
+      <p:sp>
+        <p:nvSpPr>
+          <p:cNvPr id="8" name="map-label"/>
+          <p:cNvSpPr txBox="1"/>
+          <p:nvPr/>
+        </p:nvSpPr>
+        <p:spPr>
+          <a:xfrm xmlns:a="http://schemas.openxmlformats.org/drawingml/2006/main">
+            <a:off x="1066800" y="3143250"/>
+            <a:ext cx="5143500" cy="209550"/>
+          </a:xfrm>
+          <a:prstGeom xmlns:a="http://schemas.openxmlformats.org/drawingml/2006/main" prst="rect">
+            <a:avLst/>
+          </a:prstGeom>
+          <a:noFill xmlns:a="http://schemas.openxmlformats.org/drawingml/2006/main"/>
+          <a:ln xmlns:a="http://schemas.openxmlformats.org/drawingml/2006/main" w="0">
+            <a:noFill/>
+          </a:ln>
+        </p:spPr>
+        <p:txBody>
+          <a:bodyPr xmlns:a="http://schemas.openxmlformats.org/drawingml/2006/main" wrap="square" lIns="0" tIns="0" rIns="0" bIns="0" anchor="t"/>
+          <a:lstStyle xmlns:a="http://schemas.openxmlformats.org/drawingml/2006/main"/>
+          <a:p xmlns:a="http://schemas.openxmlformats.org/drawingml/2006/main">
+            <a:r>
+              <a:rPr lang="en-US" sz="1050" b="1">
+                <a:solidFill>
+                  <a:srgbClr val="2278E8"/>
+                </a:solidFill>
+                <a:latin typeface="Inter"/>
+                <a:ea typeface="Inter"/>
+              </a:rPr>
+              <a:t>DIRECT-LABELLED DISTRIBUTION</a:t>
+            </a:r>
+            <a:endParaRPr lang="en-US"/>
+          </a:p>
+        </p:txBody>
+      </p:sp>
+      <p:sp>
+        <p:nvSpPr>
+          <p:cNvPr id="9" name="map-field"/>
+          <p:cNvSpPr/>
+          <p:nvPr/>
+        </p:nvSpPr>
+        <p:spPr>
+          <a:xfrm xmlns:a="http://schemas.openxmlformats.org/drawingml/2006/main">
+            <a:off x="1066800" y="3524250"/>
+            <a:ext cx="7524750" cy="2647950"/>
+          </a:xfrm>
+          <a:prstGeom xmlns:a="http://schemas.openxmlformats.org/drawingml/2006/main" prst="rect">
+            <a:avLst/>
+          </a:prstGeom>
+          <a:solidFill xmlns:a="http://schemas.openxmlformats.org/drawingml/2006/main">
+            <a:srgbClr val="F2E3EC"/>
+          </a:solidFill>
+          <a:ln xmlns:a="http://schemas.openxmlformats.org/drawingml/2006/main" w="12700">
+            <a:solidFill>
+              <a:srgbClr val="8F9B9E"/>
+            </a:solidFill>
+            <a:prstDash val="solid"/>
+          </a:ln>
+        </p:spPr>
+        <p:txBody>
+          <a:bodyPr xmlns:a="http://schemas.openxmlformats.org/drawingml/2006/main" wrap="square" lIns="0" tIns="0" rIns="0" bIns="0" anchor="t"/>
+          <a:lstStyle xmlns:a="http://schemas.openxmlformats.org/drawingml/2006/main"/>
+          <a:p xmlns:a="http://schemas.openxmlformats.org/drawingml/2006/main">
+            <a:r>
+              <a:rPr lang="en-US"/>
+              <a:t/>
+            </a:r>
+            <a:endParaRPr lang="en-US"/>
+          </a:p>
+        </p:txBody>
+      </p:sp>
+      <p:sp>
+        <p:nvSpPr>
+          <p:cNvPr id="10" name="map-region-0"/>
+          <p:cNvSpPr/>
+          <p:nvPr/>
+        </p:nvSpPr>
+        <p:spPr>
+          <a:xfrm xmlns:a="http://schemas.openxmlformats.org/drawingml/2006/main">
+            <a:off x="1619250" y="4324350"/>
+            <a:ext cx="1428750" cy="704850"/>
+          </a:xfrm>
+          <a:prstGeom xmlns:a="http://schemas.openxmlformats.org/drawingml/2006/main" prst="rect">
+            <a:avLst/>
+          </a:prstGeom>
+          <a:solidFill xmlns:a="http://schemas.openxmlformats.org/drawingml/2006/main">
+            <a:srgbClr val="B64A98">
+              <a:alpha val="48000"/>
+            </a:srgbClr>
+          </a:solidFill>
+          <a:ln xmlns:a="http://schemas.openxmlformats.org/drawingml/2006/main" w="25400">
+            <a:solidFill>
+              <a:srgbClr val="FCFCFA"/>
+            </a:solidFill>
+            <a:prstDash val="solid"/>
+          </a:ln>
+        </p:spPr>
+        <p:txBody>
+          <a:bodyPr xmlns:a="http://schemas.openxmlformats.org/drawingml/2006/main" wrap="square" lIns="0" tIns="0" rIns="0" bIns="0" anchor="t"/>
+          <a:lstStyle xmlns:a="http://schemas.openxmlformats.org/drawingml/2006/main"/>
+          <a:p xmlns:a="http://schemas.openxmlformats.org/drawingml/2006/main">
+            <a:r>
+              <a:rPr lang="en-US"/>
+              <a:t/>
+            </a:r>
+            <a:endParaRPr lang="en-US"/>
+          </a:p>
+        </p:txBody>
+      </p:sp>
+      <p:sp>
+        <p:nvSpPr>
+          <p:cNvPr id="11" name="map-region-1"/>
+          <p:cNvSpPr/>
+          <p:nvPr/>
+        </p:nvSpPr>
+        <p:spPr>
+          <a:xfrm xmlns:a="http://schemas.openxmlformats.org/drawingml/2006/main">
+            <a:off x="3295650" y="3962400"/>
+            <a:ext cx="1790700" cy="876300"/>
+          </a:xfrm>
+          <a:prstGeom xmlns:a="http://schemas.openxmlformats.org/drawingml/2006/main" prst="rect">
+            <a:avLst/>
+          </a:prstGeom>
+          <a:solidFill xmlns:a="http://schemas.openxmlformats.org/drawingml/2006/main">
+            <a:srgbClr val="2278E8">
+              <a:alpha val="76000"/>
+            </a:srgbClr>
+          </a:solidFill>
+          <a:ln xmlns:a="http://schemas.openxmlformats.org/drawingml/2006/main" w="25400">
+            <a:solidFill>
+              <a:srgbClr val="FCFCFA"/>
+            </a:solidFill>
+            <a:prstDash val="solid"/>
+          </a:ln>
+        </p:spPr>
+        <p:txBody>
+          <a:bodyPr xmlns:a="http://schemas.openxmlformats.org/drawingml/2006/main" wrap="square" lIns="0" tIns="0" rIns="0" bIns="0" anchor="t"/>
+          <a:lstStyle xmlns:a="http://schemas.openxmlformats.org/drawingml/2006/main"/>
+          <a:p xmlns:a="http://schemas.openxmlformats.org/drawingml/2006/main">
+            <a:r>
+              <a:rPr lang="en-US"/>
+              <a:t/>
+            </a:r>
+            <a:endParaRPr lang="en-US"/>
+          </a:p>
+        </p:txBody>
+      </p:sp>
+      <p:sp>
+        <p:nvSpPr>
+          <p:cNvPr id="12" name="map-region-2"/>
+          <p:cNvSpPr/>
+          <p:nvPr/>
+        </p:nvSpPr>
+        <p:spPr>
+          <a:xfrm xmlns:a="http://schemas.openxmlformats.org/drawingml/2006/main">
+            <a:off x="5295900" y="4457700"/>
+            <a:ext cx="1200150" cy="666750"/>
+          </a:xfrm>
+          <a:prstGeom xmlns:a="http://schemas.openxmlformats.org/drawingml/2006/main" prst="rect">
+            <a:avLst/>
+          </a:prstGeom>
+          <a:solidFill xmlns:a="http://schemas.openxmlformats.org/drawingml/2006/main">
+            <a:srgbClr val="B64A98">
+              <a:alpha val="48000"/>
+            </a:srgbClr>
+          </a:solidFill>
+          <a:ln xmlns:a="http://schemas.openxmlformats.org/drawingml/2006/main" w="25400">
+            <a:solidFill>
+              <a:srgbClr val="FCFCFA"/>
+            </a:solidFill>
+            <a:prstDash val="solid"/>
+          </a:ln>
+        </p:spPr>
+        <p:txBody>
+          <a:bodyPr xmlns:a="http://schemas.openxmlformats.org/drawingml/2006/main" wrap="square" lIns="0" tIns="0" rIns="0" bIns="0" anchor="t"/>
+          <a:lstStyle xmlns:a="http://schemas.openxmlformats.org/drawingml/2006/main"/>
+          <a:p xmlns:a="http://schemas.openxmlformats.org/drawingml/2006/main">
+            <a:r>
+              <a:rPr lang="en-US"/>
+              <a:t/>
+            </a:r>
+            <a:endParaRPr lang="en-US"/>
+          </a:p>
+        </p:txBody>
+      </p:sp>
+      <p:sp>
+        <p:nvSpPr>
+          <p:cNvPr id="13" name="map-region-3"/>
+          <p:cNvSpPr/>
+          <p:nvPr/>
+        </p:nvSpPr>
+        <p:spPr>
+          <a:xfrm xmlns:a="http://schemas.openxmlformats.org/drawingml/2006/main">
+            <a:off x="6705600" y="3848100"/>
+            <a:ext cx="1238250" cy="952500"/>
+          </a:xfrm>
+          <a:prstGeom xmlns:a="http://schemas.openxmlformats.org/drawingml/2006/main" prst="rect">
+            <a:avLst/>
+          </a:prstGeom>
+          <a:solidFill xmlns:a="http://schemas.openxmlformats.org/drawingml/2006/main">
+            <a:srgbClr val="2278E8">
+              <a:alpha val="76000"/>
+            </a:srgbClr>
+          </a:solidFill>
+          <a:ln xmlns:a="http://schemas.openxmlformats.org/drawingml/2006/main" w="25400">
+            <a:solidFill>
+              <a:srgbClr val="FCFCFA"/>
+            </a:solidFill>
+            <a:prstDash val="solid"/>
+          </a:ln>
+        </p:spPr>
+        <p:txBody>
+          <a:bodyPr xmlns:a="http://schemas.openxmlformats.org/drawingml/2006/main" wrap="square" lIns="0" tIns="0" rIns="0" bIns="0" anchor="t"/>
+          <a:lstStyle xmlns:a="http://schemas.openxmlformats.org/drawingml/2006/main"/>
+          <a:p xmlns:a="http://schemas.openxmlformats.org/drawingml/2006/main">
+            <a:r>
+              <a:rPr lang="en-US"/>
+              <a:t/>
+            </a:r>
+            <a:endParaRPr lang="en-US"/>
+          </a:p>
+        </p:txBody>
+      </p:sp>
+      <p:sp>
+        <p:nvSpPr>
+          <p:cNvPr id="14" name="map-region-4"/>
+          <p:cNvSpPr/>
+          <p:nvPr/>
+        </p:nvSpPr>
+        <p:spPr>
+          <a:xfrm xmlns:a="http://schemas.openxmlformats.org/drawingml/2006/main">
+            <a:off x="2590800" y="5219700"/>
+            <a:ext cx="1943100" cy="590550"/>
+          </a:xfrm>
+          <a:prstGeom xmlns:a="http://schemas.openxmlformats.org/drawingml/2006/main" prst="rect">
+            <a:avLst/>
+          </a:prstGeom>
+          <a:solidFill xmlns:a="http://schemas.openxmlformats.org/drawingml/2006/main">
+            <a:srgbClr val="8F9B9E">
+              <a:alpha val="48000"/>
+            </a:srgbClr>
+          </a:solidFill>
+          <a:ln xmlns:a="http://schemas.openxmlformats.org/drawingml/2006/main" w="25400">
+            <a:solidFill>
+              <a:srgbClr val="FCFCFA"/>
+            </a:solidFill>
+            <a:prstDash val="solid"/>
+          </a:ln>
+        </p:spPr>
+        <p:txBody>
+          <a:bodyPr xmlns:a="http://schemas.openxmlformats.org/drawingml/2006/main" wrap="square" lIns="0" tIns="0" rIns="0" bIns="0" anchor="t"/>
+          <a:lstStyle xmlns:a="http://schemas.openxmlformats.org/drawingml/2006/main"/>
+          <a:p xmlns:a="http://schemas.openxmlformats.org/drawingml/2006/main">
+            <a:r>
+              <a:rPr lang="en-US"/>
+              <a:t/>
+            </a:r>
+            <a:endParaRPr lang="en-US"/>
+          </a:p>
+        </p:txBody>
+      </p:sp>
+      <p:sp>
+        <p:nvSpPr>
+          <p:cNvPr id="15" name="map-region-5"/>
+          <p:cNvSpPr/>
+          <p:nvPr/>
+        </p:nvSpPr>
+        <p:spPr>
+          <a:xfrm xmlns:a="http://schemas.openxmlformats.org/drawingml/2006/main">
+            <a:off x="4895850" y="5334000"/>
+            <a:ext cx="1447800" cy="514350"/>
+          </a:xfrm>
+          <a:prstGeom xmlns:a="http://schemas.openxmlformats.org/drawingml/2006/main" prst="rect">
+            <a:avLst/>
+          </a:prstGeom>
+          <a:solidFill xmlns:a="http://schemas.openxmlformats.org/drawingml/2006/main">
+            <a:srgbClr val="B64A98">
+              <a:alpha val="76000"/>
+            </a:srgbClr>
+          </a:solidFill>
+          <a:ln xmlns:a="http://schemas.openxmlformats.org/drawingml/2006/main" w="25400">
+            <a:solidFill>
+              <a:srgbClr val="FCFCFA"/>
+            </a:solidFill>
+            <a:prstDash val="solid"/>
+          </a:ln>
+        </p:spPr>
+        <p:txBody>
+          <a:bodyPr xmlns:a="http://schemas.openxmlformats.org/drawingml/2006/main" wrap="square" lIns="0" tIns="0" rIns="0" bIns="0" anchor="t"/>
+          <a:lstStyle xmlns:a="http://schemas.openxmlformats.org/drawingml/2006/main"/>
+          <a:p xmlns:a="http://schemas.openxmlformats.org/drawingml/2006/main">
+            <a:r>
+              <a:rPr lang="en-US"/>
+              <a:t/>
+            </a:r>
+            <a:endParaRPr lang="en-US"/>
+          </a:p>
+        </p:txBody>
+      </p:sp>
+      <p:sp>
+        <p:nvSpPr>
+          <p:cNvPr id="16" name="map-leader-0"/>
+          <p:cNvSpPr/>
+          <p:nvPr/>
+        </p:nvSpPr>
+        <p:spPr>
+          <a:xfrm xmlns:a="http://schemas.openxmlformats.org/drawingml/2006/main">
+            <a:off x="1943100" y="4362450"/>
+            <a:ext cx="209550" cy="228600"/>
+          </a:xfrm>
+          <a:prstGeom xmlns:a="http://schemas.openxmlformats.org/drawingml/2006/main" prst="line">
+            <a:avLst/>
+          </a:prstGeom>
+          <a:noFill xmlns:a="http://schemas.openxmlformats.org/drawingml/2006/main"/>
+          <a:ln xmlns:a="http://schemas.openxmlformats.org/drawingml/2006/main" w="12700">
+            <a:solidFill>
+              <a:srgbClr val="18313A"/>
+            </a:solidFill>
+            <a:prstDash val="solid"/>
+          </a:ln>
+        </p:spPr>
+        <p:txBody>
+          <a:bodyPr xmlns:a="http://schemas.openxmlformats.org/drawingml/2006/main" wrap="square" lIns="0" tIns="0" rIns="0" bIns="0" anchor="t"/>
+          <a:lstStyle xmlns:a="http://schemas.openxmlformats.org/drawingml/2006/main"/>
+          <a:p xmlns:a="http://schemas.openxmlformats.org/drawingml/2006/main">
+            <a:r>
+              <a:rPr lang="en-US"/>
+              <a:t/>
+            </a:r>
+            <a:endParaRPr lang="en-US"/>
+          </a:p>
+        </p:txBody>
+      </p:sp>
+      <p:sp>
+        <p:nvSpPr>
+          <p:cNvPr id="17" name="map-label-0"/>
+          <p:cNvSpPr txBox="1"/>
+          <p:nvPr/>
+        </p:nvSpPr>
+        <p:spPr>
+          <a:xfrm xmlns:a="http://schemas.openxmlformats.org/drawingml/2006/main">
+            <a:off x="2190750" y="4095750"/>
+            <a:ext cx="1428750" cy="228600"/>
+          </a:xfrm>
+          <a:prstGeom xmlns:a="http://schemas.openxmlformats.org/drawingml/2006/main" prst="rect">
+            <a:avLst/>
+          </a:prstGeom>
+          <a:noFill xmlns:a="http://schemas.openxmlformats.org/drawingml/2006/main"/>
+          <a:ln xmlns:a="http://schemas.openxmlformats.org/drawingml/2006/main" w="0">
+            <a:noFill/>
+          </a:ln>
+        </p:spPr>
+        <p:txBody>
+          <a:bodyPr xmlns:a="http://schemas.openxmlformats.org/drawingml/2006/main" wrap="square" lIns="0" tIns="0" rIns="0" bIns="0" anchor="t"/>
+          <a:lstStyle xmlns:a="http://schemas.openxmlformats.org/drawingml/2006/main"/>
+          <a:p xmlns:a="http://schemas.openxmlformats.org/drawingml/2006/main">
+            <a:r>
+              <a:rPr lang="en-US" sz="1125" b="1">
+                <a:solidFill>
+                  <a:srgbClr val="18313A"/>
+                </a:solidFill>
+                <a:latin typeface="Inter"/>
+                <a:ea typeface="Inter"/>
+              </a:rPr>
+              <a:t>North · 42%</a:t>
+            </a:r>
+            <a:endParaRPr lang="en-US"/>
+          </a:p>
+        </p:txBody>
+      </p:sp>
+      <p:sp>
+        <p:nvSpPr>
+          <p:cNvPr id="18" name="map-leader-1"/>
+          <p:cNvSpPr/>
+          <p:nvPr/>
+        </p:nvSpPr>
+        <p:spPr>
+          <a:xfrm xmlns:a="http://schemas.openxmlformats.org/drawingml/2006/main">
+            <a:off x="3676650" y="3981450"/>
+            <a:ext cx="209550" cy="228600"/>
+          </a:xfrm>
+          <a:prstGeom xmlns:a="http://schemas.openxmlformats.org/drawingml/2006/main" prst="line">
+            <a:avLst/>
+          </a:prstGeom>
+          <a:noFill xmlns:a="http://schemas.openxmlformats.org/drawingml/2006/main"/>
+          <a:ln xmlns:a="http://schemas.openxmlformats.org/drawingml/2006/main" w="12700">
+            <a:solidFill>
+              <a:srgbClr val="18313A"/>
+            </a:solidFill>
+            <a:prstDash val="solid"/>
+          </a:ln>
+        </p:spPr>
+        <p:txBody>
+          <a:bodyPr xmlns:a="http://schemas.openxmlformats.org/drawingml/2006/main" wrap="square" lIns="0" tIns="0" rIns="0" bIns="0" anchor="t"/>
+          <a:lstStyle xmlns:a="http://schemas.openxmlformats.org/drawingml/2006/main"/>
+          <a:p xmlns:a="http://schemas.openxmlformats.org/drawingml/2006/main">
+            <a:r>
+              <a:rPr lang="en-US"/>
+              <a:t/>
+            </a:r>
+            <a:endParaRPr lang="en-US"/>
+          </a:p>
+        </p:txBody>
+      </p:sp>
+      <p:sp>
+        <p:nvSpPr>
+          <p:cNvPr id="19" name="map-label-1"/>
+          <p:cNvSpPr txBox="1"/>
+          <p:nvPr/>
+        </p:nvSpPr>
+        <p:spPr>
+          <a:xfrm xmlns:a="http://schemas.openxmlformats.org/drawingml/2006/main">
+            <a:off x="3924300" y="3714750"/>
+            <a:ext cx="1428750" cy="228600"/>
+          </a:xfrm>
+          <a:prstGeom xmlns:a="http://schemas.openxmlformats.org/drawingml/2006/main" prst="rect">
+            <a:avLst/>
+          </a:prstGeom>
+          <a:noFill xmlns:a="http://schemas.openxmlformats.org/drawingml/2006/main"/>
+          <a:ln xmlns:a="http://schemas.openxmlformats.org/drawingml/2006/main" w="0">
+            <a:noFill/>
+          </a:ln>
+        </p:spPr>
+        <p:txBody>
+          <a:bodyPr xmlns:a="http://schemas.openxmlformats.org/drawingml/2006/main" wrap="square" lIns="0" tIns="0" rIns="0" bIns="0" anchor="t"/>
+          <a:lstStyle xmlns:a="http://schemas.openxmlformats.org/drawingml/2006/main"/>
+          <a:p xmlns:a="http://schemas.openxmlformats.org/drawingml/2006/main">
+            <a:r>
+              <a:rPr lang="en-US" sz="1125" b="1">
+                <a:solidFill>
+                  <a:srgbClr val="18313A"/>
+                </a:solidFill>
+                <a:latin typeface="Inter"/>
+                <a:ea typeface="Inter"/>
+              </a:rPr>
+              <a:t>Central · 68%</a:t>
+            </a:r>
+            <a:endParaRPr lang="en-US"/>
+          </a:p>
+        </p:txBody>
+      </p:sp>
+      <p:sp>
+        <p:nvSpPr>
+          <p:cNvPr id="20" name="map-leader-2"/>
+          <p:cNvSpPr/>
+          <p:nvPr/>
+        </p:nvSpPr>
+        <p:spPr>
+          <a:xfrm xmlns:a="http://schemas.openxmlformats.org/drawingml/2006/main">
+            <a:off x="6934200" y="3886200"/>
+            <a:ext cx="209550" cy="228600"/>
+          </a:xfrm>
+          <a:prstGeom xmlns:a="http://schemas.openxmlformats.org/drawingml/2006/main" prst="line">
+            <a:avLst/>
+          </a:prstGeom>
+          <a:noFill xmlns:a="http://schemas.openxmlformats.org/drawingml/2006/main"/>
+          <a:ln xmlns:a="http://schemas.openxmlformats.org/drawingml/2006/main" w="12700">
+            <a:solidFill>
+              <a:srgbClr val="18313A"/>
+            </a:solidFill>
+            <a:prstDash val="solid"/>
+          </a:ln>
+        </p:spPr>
+        <p:txBody>
+          <a:bodyPr xmlns:a="http://schemas.openxmlformats.org/drawingml/2006/main" wrap="square" lIns="0" tIns="0" rIns="0" bIns="0" anchor="t"/>
+          <a:lstStyle xmlns:a="http://schemas.openxmlformats.org/drawingml/2006/main"/>
+          <a:p xmlns:a="http://schemas.openxmlformats.org/drawingml/2006/main">
+            <a:r>
+              <a:rPr lang="en-US"/>
+              <a:t/>
+            </a:r>
+            <a:endParaRPr lang="en-US"/>
+          </a:p>
+        </p:txBody>
+      </p:sp>
+      <p:sp>
+        <p:nvSpPr>
+          <p:cNvPr id="21" name="map-label-2"/>
+          <p:cNvSpPr txBox="1"/>
+          <p:nvPr/>
+        </p:nvSpPr>
+        <p:spPr>
+          <a:xfrm xmlns:a="http://schemas.openxmlformats.org/drawingml/2006/main">
+            <a:off x="7181850" y="3619500"/>
+            <a:ext cx="1428750" cy="228600"/>
+          </a:xfrm>
+          <a:prstGeom xmlns:a="http://schemas.openxmlformats.org/drawingml/2006/main" prst="rect">
+            <a:avLst/>
+          </a:prstGeom>
+          <a:noFill xmlns:a="http://schemas.openxmlformats.org/drawingml/2006/main"/>
+          <a:ln xmlns:a="http://schemas.openxmlformats.org/drawingml/2006/main" w="0">
+            <a:noFill/>
+          </a:ln>
+        </p:spPr>
+        <p:txBody>
+          <a:bodyPr xmlns:a="http://schemas.openxmlformats.org/drawingml/2006/main" wrap="square" lIns="0" tIns="0" rIns="0" bIns="0" anchor="t"/>
+          <a:lstStyle xmlns:a="http://schemas.openxmlformats.org/drawingml/2006/main"/>
+          <a:p xmlns:a="http://schemas.openxmlformats.org/drawingml/2006/main">
+            <a:r>
+              <a:rPr lang="en-US" sz="1125" b="1">
+                <a:solidFill>
+                  <a:srgbClr val="18313A"/>
+                </a:solidFill>
+                <a:latin typeface="Inter"/>
+                <a:ea typeface="Inter"/>
+              </a:rPr>
+              <a:t>East · 55%</a:t>
+            </a:r>
+            <a:endParaRPr lang="en-US"/>
+          </a:p>
+        </p:txBody>
+      </p:sp>
+      <p:sp>
+        <p:nvSpPr>
+          <p:cNvPr id="22" name="map-leader-3"/>
+          <p:cNvSpPr/>
+          <p:nvPr/>
+        </p:nvSpPr>
+        <p:spPr>
+          <a:xfrm xmlns:a="http://schemas.openxmlformats.org/drawingml/2006/main">
+            <a:off x="2952750" y="6343650"/>
+            <a:ext cx="209550" cy="228600"/>
+          </a:xfrm>
+          <a:prstGeom xmlns:a="http://schemas.openxmlformats.org/drawingml/2006/main" prst="line">
+            <a:avLst/>
+          </a:prstGeom>
+          <a:noFill xmlns:a="http://schemas.openxmlformats.org/drawingml/2006/main"/>
+          <a:ln xmlns:a="http://schemas.openxmlformats.org/drawingml/2006/main" w="12700">
+            <a:solidFill>
+              <a:srgbClr val="18313A"/>
+            </a:solidFill>
+            <a:prstDash val="solid"/>
+          </a:ln>
+        </p:spPr>
+        <p:txBody>
+          <a:bodyPr xmlns:a="http://schemas.openxmlformats.org/drawingml/2006/main" wrap="square" lIns="0" tIns="0" rIns="0" bIns="0" anchor="t"/>
+          <a:lstStyle xmlns:a="http://schemas.openxmlformats.org/drawingml/2006/main"/>
+          <a:p xmlns:a="http://schemas.openxmlformats.org/drawingml/2006/main">
+            <a:r>
+              <a:rPr lang="en-US"/>
+              <a:t/>
+            </a:r>
+            <a:endParaRPr lang="en-US"/>
+          </a:p>
+        </p:txBody>
+      </p:sp>
+      <p:sp>
+        <p:nvSpPr>
+          <p:cNvPr id="23" name="map-label-3"/>
+          <p:cNvSpPr txBox="1"/>
+          <p:nvPr/>
+        </p:nvSpPr>
+        <p:spPr>
+          <a:xfrm xmlns:a="http://schemas.openxmlformats.org/drawingml/2006/main">
+            <a:off x="3200400" y="6076950"/>
+            <a:ext cx="1428750" cy="228600"/>
+          </a:xfrm>
+          <a:prstGeom xmlns:a="http://schemas.openxmlformats.org/drawingml/2006/main" prst="rect">
+            <a:avLst/>
+          </a:prstGeom>
+          <a:noFill xmlns:a="http://schemas.openxmlformats.org/drawingml/2006/main"/>
+          <a:ln xmlns:a="http://schemas.openxmlformats.org/drawingml/2006/main" w="0">
+            <a:noFill/>
+          </a:ln>
+        </p:spPr>
+        <p:txBody>
+          <a:bodyPr xmlns:a="http://schemas.openxmlformats.org/drawingml/2006/main" wrap="square" lIns="0" tIns="0" rIns="0" bIns="0" anchor="t"/>
+          <a:lstStyle xmlns:a="http://schemas.openxmlformats.org/drawingml/2006/main"/>
+          <a:p xmlns:a="http://schemas.openxmlformats.org/drawingml/2006/main">
+            <a:r>
+              <a:rPr lang="en-US" sz="1125" b="1">
+                <a:solidFill>
+                  <a:srgbClr val="18313A"/>
+                </a:solidFill>
+                <a:latin typeface="Inter"/>
+                <a:ea typeface="Inter"/>
+              </a:rPr>
+              <a:t>South · 31%</a:t>
+            </a:r>
+            <a:endParaRPr lang="en-US"/>
+          </a:p>
+        </p:txBody>
+      </p:sp>
+      <p:sp>
+        <p:nvSpPr>
+          <p:cNvPr id="24" name="map-read-label"/>
+          <p:cNvSpPr txBox="1"/>
+          <p:nvPr/>
+        </p:nvSpPr>
+        <p:spPr>
+          <a:xfrm xmlns:a="http://schemas.openxmlformats.org/drawingml/2006/main">
+            <a:off x="9906000" y="3333750"/>
+            <a:ext cx="3048000" cy="228600"/>
+          </a:xfrm>
+          <a:prstGeom xmlns:a="http://schemas.openxmlformats.org/drawingml/2006/main" prst="rect">
+            <a:avLst/>
+          </a:prstGeom>
+          <a:noFill xmlns:a="http://schemas.openxmlformats.org/drawingml/2006/main"/>
+          <a:ln xmlns:a="http://schemas.openxmlformats.org/drawingml/2006/main" w="0">
+            <a:noFill/>
+          </a:ln>
+        </p:spPr>
+        <p:txBody>
+          <a:bodyPr xmlns:a="http://schemas.openxmlformats.org/drawingml/2006/main" wrap="square" lIns="0" tIns="0" rIns="0" bIns="0" anchor="t"/>
+          <a:lstStyle xmlns:a="http://schemas.openxmlformats.org/drawingml/2006/main"/>
+          <a:p xmlns:a="http://schemas.openxmlformats.org/drawingml/2006/main">
+            <a:r>
+              <a:rPr lang="en-US" sz="1125" b="1">
+                <a:solidFill>
+                  <a:srgbClr val="2278E8"/>
+                </a:solidFill>
+                <a:latin typeface="Inter"/>
+                <a:ea typeface="Inter"/>
+              </a:rPr>
+              <a:t>READ-THROUGH</a:t>
+            </a:r>
+            <a:endParaRPr lang="en-US"/>
+          </a:p>
+        </p:txBody>
+      </p:sp>
+      <p:sp>
+        <p:nvSpPr>
+          <p:cNvPr id="25" name="map-read-title"/>
+          <p:cNvSpPr txBox="1"/>
+          <p:nvPr/>
+        </p:nvSpPr>
+        <p:spPr>
+          <a:xfrm xmlns:a="http://schemas.openxmlformats.org/drawingml/2006/main">
+            <a:off x="9906000" y="3829050"/>
+            <a:ext cx="3429000" cy="723900"/>
+          </a:xfrm>
+          <a:prstGeom xmlns:a="http://schemas.openxmlformats.org/drawingml/2006/main" prst="rect">
+            <a:avLst/>
+          </a:prstGeom>
+          <a:noFill xmlns:a="http://schemas.openxmlformats.org/drawingml/2006/main"/>
+          <a:ln xmlns:a="http://schemas.openxmlformats.org/drawingml/2006/main" w="0">
+            <a:noFill/>
+          </a:ln>
+        </p:spPr>
+        <p:txBody>
+          <a:bodyPr xmlns:a="http://schemas.openxmlformats.org/drawingml/2006/main" wrap="square" lIns="0" tIns="0" rIns="0" bIns="0" anchor="t"/>
+          <a:lstStyle xmlns:a="http://schemas.openxmlformats.org/drawingml/2006/main"/>
+          <a:p xmlns:a="http://schemas.openxmlformats.org/drawingml/2006/main">
+            <a:r>
+              <a:rPr lang="en-US" sz="2100" b="1">
+                <a:solidFill>
+                  <a:srgbClr val="18313A"/>
+                </a:solidFill>
+                <a:latin typeface="Inter"/>
+                <a:ea typeface="Inter"/>
+              </a:rPr>
+              <a:t>The geography changes the decision.</a:t>
+            </a:r>
+            <a:endParaRPr lang="en-US"/>
+          </a:p>
+        </p:txBody>
+      </p:sp>
+      <p:sp>
+        <p:nvSpPr>
+          <p:cNvPr id="26" name="map-read-body"/>
+          <p:cNvSpPr txBox="1"/>
+          <p:nvPr/>
+        </p:nvSpPr>
+        <p:spPr>
+          <a:xfrm xmlns:a="http://schemas.openxmlformats.org/drawingml/2006/main">
+            <a:off x="9906000" y="4953000"/>
+            <a:ext cx="3429000" cy="895350"/>
+          </a:xfrm>
+          <a:prstGeom xmlns:a="http://schemas.openxmlformats.org/drawingml/2006/main" prst="rect">
+            <a:avLst/>
+          </a:prstGeom>
+          <a:noFill xmlns:a="http://schemas.openxmlformats.org/drawingml/2006/main"/>
+          <a:ln xmlns:a="http://schemas.openxmlformats.org/drawingml/2006/main" w="0">
+            <a:noFill/>
+          </a:ln>
+        </p:spPr>
+        <p:txBody>
+          <a:bodyPr xmlns:a="http://schemas.openxmlformats.org/drawingml/2006/main" wrap="square" lIns="0" tIns="0" rIns="0" bIns="0" anchor="t"/>
+          <a:lstStyle xmlns:a="http://schemas.openxmlformats.org/drawingml/2006/main"/>
+          <a:p xmlns:a="http://schemas.openxmlformats.org/drawingml/2006/main">
+            <a:r>
+              <a:rPr lang="en-US" sz="1275">
+                <a:solidFill>
+                  <a:srgbClr val="8F9B9E"/>
+                </a:solidFill>
+                <a:latin typeface="Inter"/>
+                <a:ea typeface="Inter"/>
+              </a:rPr>
+              <a:t>Use a map only when position, distribution, or concentration carries the argument. Direct labels stay next to the region they qualify.</a:t>
+            </a:r>
+            <a:endParaRPr lang="en-US"/>
+          </a:p>
+        </p:txBody>
+      </p:sp>
+      <p:sp>
+        <p:nvSpPr>
+          <p:cNvPr id="27" name="visual-note"/>
           <p:cNvSpPr/>
           <p:nvPr/>
         </p:nvSpPr>
@@ -4190,7 +4860,7 @@
       </p:sp>
       <p:sp>
         <p:nvSpPr>
-          <p:cNvPr id="11" name="visual-note-label"/>
+          <p:cNvPr id="28" name="visual-note-label"/>
           <p:cNvSpPr txBox="1"/>
           <p:nvPr/>
         </p:nvSpPr>
@@ -4227,7 +4897,7 @@
       </p:sp>
       <p:sp>
         <p:nvSpPr>
-          <p:cNvPr id="12" name="visual-note-text"/>
+          <p:cNvPr id="29" name="visual-note-text"/>
           <p:cNvSpPr txBox="1"/>
           <p:nvPr/>
         </p:nvSpPr>
@@ -4264,7 +4934,7 @@
       </p:sp>
       <p:sp>
         <p:nvSpPr>
-          <p:cNvPr id="13" name="visual-note-foot"/>
+          <p:cNvPr id="30" name="visual-note-foot"/>
           <p:cNvSpPr txBox="1"/>
           <p:nvPr/>
         </p:nvSpPr>
@@ -4301,7 +4971,7 @@
       </p:sp>
       <p:sp>
         <p:nvSpPr>
-          <p:cNvPr id="14" name="source"/>
+          <p:cNvPr id="31" name="source"/>
           <p:cNvSpPr txBox="1"/>
           <p:nvPr/>
         </p:nvSpPr>
@@ -4338,7 +5008,7 @@
       </p:sp>
       <p:sp>
         <p:nvSpPr>
-          <p:cNvPr id="15" name="page-number"/>
+          <p:cNvPr id="32" name="page-number"/>
           <p:cNvSpPr txBox="1"/>
           <p:nvPr/>
         </p:nvSpPr>
